--- a/presentations/PR_L10_FileHandling_Lesson.pptx
+++ b/presentations/PR_L10_FileHandling_Lesson.pptx
@@ -2167,7 +2167,7 @@
                 <a:ea typeface="IBM Plex Sans" pitchFamily="34" charset="-122"/>
                 <a:cs typeface="IBM Plex Sans" pitchFamily="34" charset="-120"/>
               </a:rPr>
-              <a:t>Data in variables disappears the moment a program ends. A file keeps it, and the records office is where you learn to open one, read it, write it and search it.</a:t>
+              <a:t>Everything a program holds in its variables disappears the moment it ends. A file keeps it. Work through the six stations and you will open a file, read it whole or a line at a time, write one from scratch, add to one and split its records into fields.</a:t>
             </a:r>
             <a:endParaRPr lang="en-US" sz="1800" dirty="0"/>
           </a:p>
@@ -2725,7 +2725,7 @@
                 <a:ea typeface="IBM Plex Sans" pitchFamily="34" charset="-122"/>
                 <a:cs typeface="IBM Plex Sans" pitchFamily="34" charset="-120"/>
               </a:rPr>
-              <a:t>Plan the two files a sales report program would need.</a:t>
+              <a:t>Which of two files does a program open in which mode, when it reads one and writes the other?</a:t>
             </a:r>
             <a:endParaRPr lang="en-US" sz="1600" dirty="0"/>
           </a:p>
@@ -2805,7 +2805,7 @@
                 <a:ea typeface="IBM Plex Sans" pitchFamily="34" charset="-122"/>
                 <a:cs typeface="IBM Plex Sans" pitchFamily="34" charset="-120"/>
               </a:rPr>
-              <a:t>Skipping blank lines is worth doing every time: a stray newline at the end of a file is very common.</a:t>
+              <a:t>A stray blank line at the end of a file is very common, so a careful program checks each line before it...</a:t>
             </a:r>
             <a:endParaRPr lang="en-US" sz="1600" dirty="0"/>
           </a:p>
@@ -3104,7 +3104,7 @@
                 <a:ea typeface="IBM Plex Sans" pitchFamily="34" charset="-122"/>
                 <a:cs typeface="IBM Plex Sans" pitchFamily="34" charset="-120"/>
               </a:rPr>
-              <a:t>Eight jobs have reached the records office. Tap the star and choose the file mode each one needs.</a:t>
+              <a:t>Eight jobs are listed on the floor below you. Tap the star and choose the file mode each one needs.</a:t>
             </a:r>
             <a:endParaRPr lang="en-US" sz="2200" dirty="0"/>
           </a:p>
@@ -3741,7 +3741,7 @@
                 <a:ea typeface="IBM Plex Sans" pitchFamily="34" charset="-122"/>
                 <a:cs typeface="IBM Plex Sans" pitchFamily="34" charset="-120"/>
               </a:rPr>
-              <a:t>Why logs append</a:t>
+              <a:t>Why append exists</a:t>
             </a:r>
             <a:endParaRPr lang="en-US" sz="1600" dirty="0"/>
           </a:p>
@@ -3783,7 +3783,7 @@
                 <a:ea typeface="IBM Plex Sans" pitchFamily="34" charset="-122"/>
                 <a:cs typeface="IBM Plex Sans" pitchFamily="34" charset="-120"/>
               </a:rPr>
-              <a:t>A log is evidence of what happened. Appending adds an entry without touching anything already written.</a:t>
+              <a:t>Append mode adds to the end without touching a single line already in the file. That is what makes it the safe mode for a file that is added to over and over.</a:t>
             </a:r>
             <a:endParaRPr lang="en-US" sz="1300" dirty="0"/>
           </a:p>
@@ -4190,7 +4190,7 @@
                 <a:ea typeface="IBM Plex Sans" pitchFamily="34" charset="-122"/>
                 <a:cs typeface="IBM Plex Sans" pitchFamily="34" charset="-120"/>
               </a:rPr>
-              <a:t>Write a program that adds a new visitor's name onto the end of log.txt without losing the names already in it, and then prints the whole file.</a:t>
+              <a:t>Write a program that reads a word and adds it onto the end of log.txt on a line of its own, without losing the lines already in the file, then prints every line of the file.</a:t>
             </a:r>
             <a:endParaRPr lang="en-US" sz="1700" dirty="0"/>
           </a:p>
@@ -4320,7 +4320,7 @@
                 <a:ea typeface="IBM Plex Sans" pitchFamily="34" charset="-122"/>
                 <a:cs typeface="IBM Plex Sans" pitchFamily="34" charset="-120"/>
               </a:rPr>
-              <a:t>Each line of members.txt holds a name and an age, separated by a comma. Write a program that prints the name of every member aged 16 or over.</a:t>
+              <a:t>Each line of data.txt holds a word and a whole number, separated by a comma. Write a program that prints the word from every line whose number is 16 or more.</a:t>
             </a:r>
             <a:endParaRPr lang="en-US" sz="1700" dirty="0"/>
           </a:p>
@@ -5824,7 +5824,7 @@
                 <a:ea typeface="IBM Plex Sans" pitchFamily="34" charset="-122"/>
                 <a:cs typeface="IBM Plex Sans" pitchFamily="34" charset="-120"/>
               </a:rPr>
-              <a:t>Understand the difference between write mode and append mode</a:t>
+              <a:t>Understand what write mode does to a file, and how append mode differs from it</a:t>
             </a:r>
             <a:endParaRPr lang="en-US" sz="1900" dirty="0"/>
           </a:p>
@@ -5922,7 +5922,7 @@
                 <a:ea typeface="IBM Plex Sans" pitchFamily="34" charset="-122"/>
                 <a:cs typeface="IBM Plex Sans" pitchFamily="34" charset="-120"/>
               </a:rPr>
-              <a:t>Know how to split one line of a file into its separate fields</a:t>
+              <a:t>Know how to split one line of a file into its separate fields and use them</a:t>
             </a:r>
             <a:endParaRPr lang="en-US" sz="1900" dirty="0"/>
           </a:p>
@@ -6656,7 +6656,7 @@
                 <a:ea typeface="IBM Plex Sans" pitchFamily="34" charset="-122"/>
                 <a:cs typeface="IBM Plex Sans" pitchFamily="34" charset="-120"/>
               </a:rPr>
-              <a:t>A program opens scores.txt in write mode, and the file already holds 40 lines of results. Write down what the file holds the moment that line has run, and which mode should have been used to add to it instead.</a:t>
+              <a:t>A program opens scores.txt in write mode, and the file already holds 40 lines. Write down what the file holds the moment that line has run, and which mode should have been used to add to it instead.</a:t>
             </a:r>
             <a:endParaRPr lang="en-US" sz="2600" dirty="0"/>
           </a:p>
@@ -8027,7 +8027,7 @@
                 <a:ea typeface="IBM Plex Sans" pitchFamily="34" charset="-122"/>
                 <a:cs typeface="IBM Plex Sans" pitchFamily="34" charset="-120"/>
               </a:rPr>
-              <a:t>A file left open can keep other programs out, and may lose data that was not written yet.</a:t>
+              <a:t>Leaving a file open can keep other programs out of it, and can lose anything not yet...</a:t>
             </a:r>
             <a:endParaRPr lang="en-US" sz="1600" dirty="0"/>
           </a:p>
@@ -8603,7 +8603,7 @@
                 <a:ea typeface="IBM Plex Sans" pitchFamily="34" charset="-122"/>
                 <a:cs typeface="IBM Plex Sans" pitchFamily="34" charset="-120"/>
               </a:rPr>
-              <a:t>A newline is one single invisible character, which is why a stripped line comes out shorter.</a:t>
+              <a:t>A newline is one single invisible character, which is why a stripped line is one character...</a:t>
             </a:r>
             <a:endParaRPr lang="en-US" sz="1600" dirty="0"/>
           </a:p>
@@ -9179,7 +9179,7 @@
                 <a:ea typeface="IBM Plex Sans" pitchFamily="34" charset="-122"/>
                 <a:cs typeface="IBM Plex Sans" pitchFamily="34" charset="-120"/>
               </a:rPr>
-              <a:t>Write mode creates the file if it is not there, which is handy and dangerous in equal measure.</a:t>
+              <a:t>Write mode makes the file when it is not there and empties it when it is, so the one thing it never does is...</a:t>
             </a:r>
             <a:endParaRPr lang="en-US" sz="1600" dirty="0"/>
           </a:p>
@@ -9519,7 +9519,7 @@
                 <a:ea typeface="IBM Plex Sans" pitchFamily="34" charset="-122"/>
                 <a:cs typeface="IBM Plex Sans" pitchFamily="34" charset="-120"/>
               </a:rPr>
-              <a:t>open(name, "a") is append mode: new text goes on the end and nothing is lost.</a:t>
+              <a:t>open(name, "a") is append mode: new text goes on the end and nothing already there is lost.</a:t>
             </a:r>
             <a:endParaRPr lang="en-US" sz="1700" dirty="0"/>
           </a:p>
@@ -9543,7 +9543,7 @@
                 <a:ea typeface="IBM Plex Sans" pitchFamily="34" charset="-122"/>
                 <a:cs typeface="IBM Plex Sans" pitchFamily="34" charset="-120"/>
               </a:rPr>
-              <a:t>Logs are always appended, so yesterday's entries are still there tomorrow.</a:t>
+              <a:t>Use it whenever the lines the file already holds have to survive the run.</a:t>
             </a:r>
             <a:endParaRPr lang="en-US" sz="1700" dirty="0"/>
           </a:p>
@@ -9567,7 +9567,7 @@
                 <a:ea typeface="IBM Plex Sans" pitchFamily="34" charset="-122"/>
                 <a:cs typeface="IBM Plex Sans" pitchFamily="34" charset="-120"/>
               </a:rPr>
-              <a:t>Common mistake: leaving the newline out, so the new entry runs straight into the last one.</a:t>
+              <a:t>Common mistake: leaving the newline out, so the new text runs straight into the last line.</a:t>
             </a:r>
             <a:endParaRPr lang="en-US" sz="1700" dirty="0"/>
           </a:p>
@@ -9675,7 +9675,7 @@
                 <a:ea typeface="IBM Plex Sans" pitchFamily="34" charset="-122"/>
                 <a:cs typeface="IBM Plex Sans" pitchFamily="34" charset="-120"/>
               </a:rPr>
-              <a:t>Which mode would a visitor log use, and why that one?</a:t>
+              <a:t>Which mode keeps what a file already holds, and why would you not use the other one?</a:t>
             </a:r>
             <a:endParaRPr lang="en-US" sz="1600" dirty="0"/>
           </a:p>
@@ -9755,7 +9755,7 @@
                 <a:ea typeface="IBM Plex Sans" pitchFamily="34" charset="-122"/>
                 <a:cs typeface="IBM Plex Sans" pitchFamily="34" charset="-120"/>
               </a:rPr>
-              <a:t>Three modes cover everything you need: r to read, w to write from scratch and a to add on the end.</a:t>
+              <a:t>Three modes cover everything you need: r reads, w starts the file again from empty and a...</a:t>
             </a:r>
             <a:endParaRPr lang="en-US" sz="1600" dirty="0"/>
           </a:p>
@@ -10251,7 +10251,7 @@
                 <a:ea typeface="IBM Plex Sans" pitchFamily="34" charset="-122"/>
                 <a:cs typeface="IBM Plex Sans" pitchFamily="34" charset="-120"/>
               </a:rPr>
-              <a:t>How does a program find the record for one particular name?</a:t>
+              <a:t>How does a program find the one record whose first field matches what was typed in?</a:t>
             </a:r>
             <a:endParaRPr lang="en-US" sz="1600" dirty="0"/>
           </a:p>
@@ -10331,7 +10331,7 @@
                 <a:ea typeface="IBM Plex Sans" pitchFamily="34" charset="-122"/>
                 <a:cs typeface="IBM Plex Sans" pitchFamily="34" charset="-120"/>
               </a:rPr>
-              <a:t>A file of comma-separated records is a CSV file, and a spreadsheet will open one straight away.</a:t>
+              <a:t>A file of comma-separated records has a name of its own, and a spreadsheet opens one straight away: it is a...</a:t>
             </a:r>
             <a:endParaRPr lang="en-US" sz="1600" dirty="0"/>
           </a:p>

--- a/presentations/PR_L10_FileHandling_Lesson.pptx
+++ b/presentations/PR_L10_FileHandling_Lesson.pptx
@@ -4060,7 +4060,75 @@
                 <a:ea typeface="IBM Plex Sans" pitchFamily="34" charset="-122"/>
                 <a:cs typeface="IBM Plex Sans" pitchFamily="34" charset="-120"/>
               </a:rPr>
-              <a:t>Every line read from a file is measured with len(), and each answer comes out one character bigger than expected. Name the character being counted, and write the line that removes it.</a:t>
+              <a:t>Every line read from a file is measured with </a:t>
+            </a:r>
+            <a:pPr indent="0" marL="0">
+              <a:lnSpc>
+                <a:spcPct val="118000"/>
+              </a:lnSpc>
+              <a:buNone/>
+            </a:pPr>
+            <a:r>
+              <a:rPr lang="en-US" sz="1700" dirty="0">
+                <a:solidFill>
+                  <a:srgbClr val="1D4ED8"/>
+                </a:solidFill>
+                <a:latin typeface="IBM Plex Mono" pitchFamily="34" charset="0"/>
+                <a:ea typeface="IBM Plex Mono" pitchFamily="34" charset="-122"/>
+                <a:cs typeface="IBM Plex Mono" pitchFamily="34" charset="-120"/>
+              </a:rPr>
+              <a:t>len</a:t>
+            </a:r>
+            <a:pPr indent="0" marL="0">
+              <a:lnSpc>
+                <a:spcPct val="118000"/>
+              </a:lnSpc>
+              <a:buNone/>
+            </a:pPr>
+            <a:r>
+              <a:rPr lang="en-US" sz="1700" dirty="0">
+                <a:solidFill>
+                  <a:srgbClr val="3F3F46"/>
+                </a:solidFill>
+                <a:latin typeface="IBM Plex Mono" pitchFamily="34" charset="0"/>
+                <a:ea typeface="IBM Plex Mono" pitchFamily="34" charset="-122"/>
+                <a:cs typeface="IBM Plex Mono" pitchFamily="34" charset="-120"/>
+              </a:rPr>
+              <a:t>(</a:t>
+            </a:r>
+            <a:pPr indent="0" marL="0">
+              <a:lnSpc>
+                <a:spcPct val="118000"/>
+              </a:lnSpc>
+              <a:buNone/>
+            </a:pPr>
+            <a:r>
+              <a:rPr lang="en-US" sz="1700" dirty="0">
+                <a:solidFill>
+                  <a:srgbClr val="3F3F46"/>
+                </a:solidFill>
+                <a:latin typeface="IBM Plex Mono" pitchFamily="34" charset="0"/>
+                <a:ea typeface="IBM Plex Mono" pitchFamily="34" charset="-122"/>
+                <a:cs typeface="IBM Plex Mono" pitchFamily="34" charset="-120"/>
+              </a:rPr>
+              <a:t>)</a:t>
+            </a:r>
+            <a:pPr indent="0" marL="0">
+              <a:lnSpc>
+                <a:spcPct val="118000"/>
+              </a:lnSpc>
+              <a:buNone/>
+            </a:pPr>
+            <a:r>
+              <a:rPr lang="en-US" sz="1700" dirty="0">
+                <a:solidFill>
+                  <a:srgbClr val="101828"/>
+                </a:solidFill>
+                <a:latin typeface="IBM Plex Sans" pitchFamily="34" charset="0"/>
+                <a:ea typeface="IBM Plex Sans" pitchFamily="34" charset="-122"/>
+                <a:cs typeface="IBM Plex Sans" pitchFamily="34" charset="-120"/>
+              </a:rPr>
+              <a:t>, and each answer comes out one character bigger than expected. Name the character being counted, and write the line that removes it.</a:t>
             </a:r>
             <a:endParaRPr lang="en-US" sz="1700" dirty="0"/>
           </a:p>
@@ -4190,7 +4258,41 @@
                 <a:ea typeface="IBM Plex Sans" pitchFamily="34" charset="-122"/>
                 <a:cs typeface="IBM Plex Sans" pitchFamily="34" charset="-120"/>
               </a:rPr>
-              <a:t>Write a program that reads a word and adds it onto the end of log.txt on a line of its own, without losing the lines already in the file, then prints every line of the file.</a:t>
+              <a:t>Write a program that reads a word and adds it onto the end of </a:t>
+            </a:r>
+            <a:pPr indent="0" marL="0">
+              <a:lnSpc>
+                <a:spcPct val="118000"/>
+              </a:lnSpc>
+              <a:buNone/>
+            </a:pPr>
+            <a:r>
+              <a:rPr lang="en-US" sz="1700" dirty="0">
+                <a:solidFill>
+                  <a:srgbClr val="15803D"/>
+                </a:solidFill>
+                <a:latin typeface="IBM Plex Mono" pitchFamily="34" charset="0"/>
+                <a:ea typeface="IBM Plex Mono" pitchFamily="34" charset="-122"/>
+                <a:cs typeface="IBM Plex Mono" pitchFamily="34" charset="-120"/>
+              </a:rPr>
+              <a:t>"log.txt"</a:t>
+            </a:r>
+            <a:pPr indent="0" marL="0">
+              <a:lnSpc>
+                <a:spcPct val="118000"/>
+              </a:lnSpc>
+              <a:buNone/>
+            </a:pPr>
+            <a:r>
+              <a:rPr lang="en-US" sz="1700" dirty="0">
+                <a:solidFill>
+                  <a:srgbClr val="101828"/>
+                </a:solidFill>
+                <a:latin typeface="IBM Plex Sans" pitchFamily="34" charset="0"/>
+                <a:ea typeface="IBM Plex Sans" pitchFamily="34" charset="-122"/>
+                <a:cs typeface="IBM Plex Sans" pitchFamily="34" charset="-120"/>
+              </a:rPr>
+              <a:t> on a line of its own, without losing the lines already in the file, then prints every line of the file.</a:t>
             </a:r>
             <a:endParaRPr lang="en-US" sz="1700" dirty="0"/>
           </a:p>
@@ -4320,7 +4422,41 @@
                 <a:ea typeface="IBM Plex Sans" pitchFamily="34" charset="-122"/>
                 <a:cs typeface="IBM Plex Sans" pitchFamily="34" charset="-120"/>
               </a:rPr>
-              <a:t>Each line of data.txt holds a word and a whole number, separated by a comma. Write a program that prints the word from every line whose number is 16 or more.</a:t>
+              <a:t>Each line of </a:t>
+            </a:r>
+            <a:pPr indent="0" marL="0">
+              <a:lnSpc>
+                <a:spcPct val="118000"/>
+              </a:lnSpc>
+              <a:buNone/>
+            </a:pPr>
+            <a:r>
+              <a:rPr lang="en-US" sz="1700" dirty="0">
+                <a:solidFill>
+                  <a:srgbClr val="15803D"/>
+                </a:solidFill>
+                <a:latin typeface="IBM Plex Mono" pitchFamily="34" charset="0"/>
+                <a:ea typeface="IBM Plex Mono" pitchFamily="34" charset="-122"/>
+                <a:cs typeface="IBM Plex Mono" pitchFamily="34" charset="-120"/>
+              </a:rPr>
+              <a:t>"data.txt"</a:t>
+            </a:r>
+            <a:pPr indent="0" marL="0">
+              <a:lnSpc>
+                <a:spcPct val="118000"/>
+              </a:lnSpc>
+              <a:buNone/>
+            </a:pPr>
+            <a:r>
+              <a:rPr lang="en-US" sz="1700" dirty="0">
+                <a:solidFill>
+                  <a:srgbClr val="101828"/>
+                </a:solidFill>
+                <a:latin typeface="IBM Plex Sans" pitchFamily="34" charset="0"/>
+                <a:ea typeface="IBM Plex Sans" pitchFamily="34" charset="-122"/>
+                <a:cs typeface="IBM Plex Sans" pitchFamily="34" charset="-120"/>
+              </a:rPr>
+              <a:t> holds a word and a whole number, separated by a comma. Write a program that prints the word from every line whose number is 16 or more.</a:t>
             </a:r>
             <a:endParaRPr lang="en-US" sz="1700" dirty="0"/>
           </a:p>

--- a/presentations/PR_L10_FileHandling_Lesson.pptx
+++ b/presentations/PR_L10_FileHandling_Lesson.pptx
@@ -19,9 +19,10 @@
     <p:sldId id="267" r:id="rId13"/>
     <p:sldId id="268" r:id="rId14"/>
     <p:sldId id="269" r:id="rId15"/>
+    <p:sldId id="270" r:id="rId16"/>
   </p:sldIdLst>
   <p:notesMasterIdLst>
-    <p:notesMasterId r:id="rId16"/>
+    <p:notesMasterId r:id="rId17"/>
   </p:notesMasterIdLst>
   <p:sldSz cx="12192000" cy="6858000"/>
   <p:notesSz cx="6858000" cy="12192000"/>
@@ -692,7 +693,13 @@
           <a:p>
             <a:r>
               <a:rPr lang="en-US" dirty="0"/>
-              <a:t>Make them commit to an answer on paper before they tap the star. Guessing first costs them the learning.</a:t>
+              <a:t>The answer is B: moss.
+Do not say it yet. Every pupil commits first - fingers, whiteboards or a show of hands on each letter in turn - and you count the split before anyone can change their mind.
+IF MOST OF THE CLASS IS RIGHT: say why it is right in one sentence and go straight on to the independent work.
+IF A SIGNIFICANT GROUP IS ON ONE WRONG LETTER: that option is the misconception to teach against before anyone goes on. Go back to station 4, Adding to a file, and work through its example again, aloud, with the class watching, then re-ask this question.
+The course's own response to a wrong answer here: The last open() used "w", which emptied the file, so ridge and hollow were gone before moss was written.
+A limitation, stated rather than papered over: one response covers every wrong option; it does not say what to revisit for each one. The course does not record what each separate wrong option means, and this slide does not invent it. Decide your own reteach for each option before the lesson; the options above are the start of it.
+This is a real activity from the experience (pr-l10-s4-c2), so the wording here is the wording a pupil will see.</a:t>
             </a:r>
             <a:endParaRPr lang="en-US" dirty="0"/>
           </a:p>
@@ -780,7 +787,7 @@
           <a:p>
             <a:r>
               <a:rPr lang="en-US" dirty="0"/>
-              <a:t>Use these as a settler, or as something for early finishers to read in the experience.</a:t>
+              <a:t>Make them commit to an answer on paper before they tap the star. Guessing first costs them the learning.</a:t>
             </a:r>
             <a:endParaRPr lang="en-US" dirty="0"/>
           </a:p>
@@ -868,7 +875,7 @@
           <a:p>
             <a:r>
               <a:rPr lang="en-US" dirty="0"/>
-              <a:t>Timed and silent. Mark against the answer sheet, then ask students to record their weakest area.</a:t>
+              <a:t>Use these as a settler, or as something for early finishers to read in the experience.</a:t>
             </a:r>
             <a:endParaRPr lang="en-US" dirty="0"/>
           </a:p>
@@ -956,7 +963,7 @@
           <a:p>
             <a:r>
               <a:rPr lang="en-US" dirty="0"/>
-              <a:t>Students copy their score-screen breakdown onto the worksheet, then rate themselves here.</a:t>
+              <a:t>Timed and silent. Mark against the answer sheet, then ask students to record their weakest area.</a:t>
             </a:r>
             <a:endParaRPr lang="en-US" dirty="0"/>
           </a:p>
@@ -980,6 +987,94 @@
             <a:fld id="{F7021451-1387-4CA6-816F-3879F97B5CBC}" type="slidenum">
               <a:rPr lang="en-US"/>
               <a:t>14</a:t>
+            </a:fld>
+            <a:endParaRPr lang="en-US"/>
+          </a:p>
+        </p:txBody>
+      </p:sp>
+    </p:spTree>
+    <p:extLst>
+      <p:ext uri="{BB962C8B-B14F-4D97-AF65-F5344CB8AC3E}">
+        <p14:creationId xmlns:p14="http://schemas.microsoft.com/office/powerpoint/2010/main" val="1024086991"/>
+      </p:ext>
+    </p:extLst>
+  </p:cSld>
+  <p:clrMapOvr>
+    <a:masterClrMapping/>
+  </p:clrMapOvr>
+</p:notes>
+</file>
+
+<file path=ppt/notesSlides/notesSlide15.xml><?xml version="1.0" encoding="utf-8"?>
+<p:notes xmlns:a="http://schemas.openxmlformats.org/drawingml/2006/main" xmlns:r="http://schemas.openxmlformats.org/officeDocument/2006/relationships" xmlns:p="http://schemas.openxmlformats.org/presentationml/2006/main">
+  <p:cSld>
+    <p:spTree>
+      <p:nvGrpSpPr>
+        <p:cNvPr id="1" name=""/>
+        <p:cNvGrpSpPr/>
+        <p:nvPr/>
+      </p:nvGrpSpPr>
+      <p:grpSpPr>
+        <a:xfrm>
+          <a:off x="0" y="0"/>
+          <a:ext cx="0" cy="0"/>
+          <a:chOff x="0" y="0"/>
+          <a:chExt cx="0" cy="0"/>
+        </a:xfrm>
+      </p:grpSpPr>
+      <p:sp>
+        <p:nvSpPr>
+          <p:cNvPr id="2" name="Slide Image Placeholder 1"/>
+          <p:cNvSpPr>
+            <a:spLocks noGrp="1" noRot="1" noChangeAspect="1"/>
+          </p:cNvSpPr>
+          <p:nvPr>
+            <p:ph type="sldImg"/>
+          </p:nvPr>
+        </p:nvSpPr>
+        <p:spPr/>
+      </p:sp>
+      <p:sp>
+        <p:nvSpPr>
+          <p:cNvPr id="3" name="Notes Placeholder 2"/>
+          <p:cNvSpPr>
+            <a:spLocks noGrp="1"/>
+          </p:cNvSpPr>
+          <p:nvPr>
+            <p:ph type="body" idx="1"/>
+          </p:nvPr>
+        </p:nvSpPr>
+        <p:spPr/>
+        <p:txBody>
+          <a:bodyPr/>
+          <a:lstStyle/>
+          <a:p>
+            <a:r>
+              <a:rPr lang="en-US" dirty="0"/>
+              <a:t>Students copy their score-screen breakdown onto the worksheet, then rate themselves here.</a:t>
+            </a:r>
+            <a:endParaRPr lang="en-US" dirty="0"/>
+          </a:p>
+        </p:txBody>
+      </p:sp>
+      <p:sp>
+        <p:nvSpPr>
+          <p:cNvPr id="4" name="Slide Number Placeholder 3"/>
+          <p:cNvSpPr>
+            <a:spLocks noGrp="1"/>
+          </p:cNvSpPr>
+          <p:nvPr>
+            <p:ph type="sldNum" sz="quarter" idx="10"/>
+          </p:nvPr>
+        </p:nvSpPr>
+        <p:spPr/>
+        <p:txBody>
+          <a:bodyPr/>
+          <a:lstStyle/>
+          <a:p>
+            <a:fld id="{F7021451-1387-4CA6-816F-3879F97B5CBC}" type="slidenum">
+              <a:rPr lang="en-US"/>
+              <a:t>15</a:t>
             </a:fld>
             <a:endParaRPr lang="en-US"/>
           </a:p>
@@ -2949,12 +3044,12 @@
         </p:nvSpPr>
         <p:spPr>
           <a:xfrm>
-            <a:off x="502920" y="438912"/>
-            <a:ext cx="3108960" cy="502920"/>
+            <a:off x="502920" y="457200"/>
+            <a:ext cx="1051560" cy="420624"/>
           </a:xfrm>
           <a:prstGeom prst="roundRect">
             <a:avLst>
-              <a:gd name="adj" fmla="val 18182"/>
+              <a:gd name="adj" fmla="val 21739"/>
             </a:avLst>
           </a:prstGeom>
           <a:solidFill>
@@ -2971,8 +3066,8 @@
         </p:nvSpPr>
         <p:spPr>
           <a:xfrm>
-            <a:off x="502920" y="438912"/>
-            <a:ext cx="3108960" cy="502920"/>
+            <a:off x="502920" y="457200"/>
+            <a:ext cx="1051560" cy="420624"/>
           </a:xfrm>
           <a:prstGeom prst="rect">
             <a:avLst/>
@@ -2988,7 +3083,7 @@
               <a:buNone/>
             </a:pPr>
             <a:r>
-              <a:rPr lang="en-US" sz="1300" b="1" dirty="0">
+              <a:rPr lang="en-US" sz="1200" b="1" dirty="0">
                 <a:solidFill>
                   <a:srgbClr val="101828"/>
                 </a:solidFill>
@@ -2996,9 +3091,9 @@
                 <a:ea typeface="IBM Plex Mono" pitchFamily="34" charset="-122"/>
                 <a:cs typeface="IBM Plex Mono" pitchFamily="34" charset="-120"/>
               </a:rPr>
-              <a:t>★  FINAL CHALLENGE</a:t>
-            </a:r>
-            <a:endParaRPr lang="en-US" sz="1300" dirty="0"/>
+              <a:t>CHECK</a:t>
+            </a:r>
+            <a:endParaRPr lang="en-US" sz="1200" dirty="0"/>
           </a:p>
         </p:txBody>
       </p:sp>
@@ -3010,8 +3105,8 @@
         </p:nvSpPr>
         <p:spPr>
           <a:xfrm>
-            <a:off x="502920" y="1097280"/>
-            <a:ext cx="11155680" cy="731520"/>
+            <a:off x="1737360" y="457200"/>
+            <a:ext cx="9875520" cy="420624"/>
           </a:xfrm>
           <a:prstGeom prst="rect">
             <a:avLst/>
@@ -3027,34 +3122,76 @@
               <a:buNone/>
             </a:pPr>
             <a:r>
-              <a:rPr lang="en-US" sz="3400" b="1" dirty="0">
-                <a:solidFill>
-                  <a:srgbClr val="101828"/>
+              <a:rPr lang="en-US" sz="1500" dirty="0">
+                <a:solidFill>
+                  <a:srgbClr val="667085"/>
                 </a:solidFill>
                 <a:latin typeface="IBM Plex Sans" pitchFamily="34" charset="0"/>
                 <a:ea typeface="IBM Plex Sans" pitchFamily="34" charset="-122"/>
                 <a:cs typeface="IBM Plex Sans" pitchFamily="34" charset="-120"/>
               </a:rPr>
-              <a:t>Which mode?</a:t>
-            </a:r>
-            <a:endParaRPr lang="en-US" sz="3400" dirty="0"/>
-          </a:p>
-        </p:txBody>
-      </p:sp>
-      <p:sp>
-        <p:nvSpPr>
-          <p:cNvPr id="8" name="Shape 6"/>
+              <a:t>Hands down. Everyone commits.</a:t>
+            </a:r>
+            <a:endParaRPr lang="en-US" sz="1500" dirty="0"/>
+          </a:p>
+        </p:txBody>
+      </p:sp>
+      <p:sp>
+        <p:nvSpPr>
+          <p:cNvPr id="8" name="Text 6"/>
+          <p:cNvSpPr txBox="1"/>
+          <p:nvPr/>
+        </p:nvSpPr>
+        <p:spPr>
+          <a:xfrm>
+            <a:off x="502920" y="1097280"/>
+            <a:ext cx="11155680" cy="914400"/>
+          </a:xfrm>
+          <a:prstGeom prst="rect">
+            <a:avLst/>
+          </a:prstGeom>
+          <a:noFill/>
+          <a:ln/>
+        </p:spPr>
+        <p:txBody>
+          <a:bodyPr wrap="square" lIns="0" tIns="0" rIns="0" bIns="0" rtlCol="0" anchor="ctr"/>
+          <a:lstStyle/>
+          <a:p>
+            <a:pPr indent="0" marL="0">
+              <a:lnSpc>
+                <a:spcPct val="115000"/>
+              </a:lnSpc>
+              <a:buNone/>
+            </a:pPr>
+            <a:r>
+              <a:rPr lang="en-US" sz="2600" b="1" dirty="0">
+                <a:solidFill>
+                  <a:srgbClr val="101828"/>
+                </a:solidFill>
+                <a:latin typeface="IBM Plex Sans" pitchFamily="34" charset="0"/>
+                <a:ea typeface="IBM Plex Sans" pitchFamily="34" charset="-122"/>
+                <a:cs typeface="IBM Plex Sans" pitchFamily="34" charset="-120"/>
+              </a:rPr>
+              <a:t>What will this program display?</a:t>
+            </a:r>
+            <a:endParaRPr lang="en-US" sz="2600" dirty="0"/>
+          </a:p>
+        </p:txBody>
+      </p:sp>
+      <p:sp>
+        <p:nvSpPr>
+          <p:cNvPr id="9" name="Shape 7"/>
           <p:cNvSpPr/>
           <p:nvPr/>
         </p:nvSpPr>
         <p:spPr>
           <a:xfrm>
-            <a:off x="502920" y="2011680"/>
-            <a:ext cx="11155680" cy="2194560"/>
+            <a:off x="502920" y="2148840"/>
+            <a:ext cx="5029200" cy="3749040"/>
           </a:xfrm>
           <a:prstGeom prst="roundRect">
             <a:avLst>
-              <a:gd name="adj" fmla="val 5000"/>
+              <a:gd name="adj" fmla="val 2927"/>
             </a:avLst>
           </a:prstGeom>
           <a:solidFill>
@@ -3062,7 +3199,7 @@
           </a:solidFill>
           <a:ln w="15875">
             <a:solidFill>
-              <a:srgbClr val="2D63FF"/>
+              <a:srgbClr val="D9DEE7"/>
             </a:solidFill>
             <a:prstDash val="solid"/>
           </a:ln>
@@ -3070,33 +3207,383 @@
       </p:sp>
       <p:sp>
         <p:nvSpPr>
-          <p:cNvPr id="9" name="Text 7"/>
-          <p:cNvSpPr txBox="1"/>
-          <p:nvPr/>
-        </p:nvSpPr>
-        <p:spPr>
-          <a:xfrm>
-            <a:off x="1005840" y="2331720"/>
-            <a:ext cx="10149840" cy="1554480"/>
-          </a:xfrm>
-          <a:prstGeom prst="rect">
-            <a:avLst/>
-          </a:prstGeom>
-          <a:noFill/>
-          <a:ln/>
-        </p:spPr>
-        <p:txBody>
-          <a:bodyPr wrap="square" lIns="0" tIns="0" rIns="0" bIns="0" rtlCol="0" anchor="ctr"/>
+          <p:cNvPr id="10" name="Text 8"/>
+          <p:cNvSpPr txBox="1"/>
+          <p:nvPr/>
+        </p:nvSpPr>
+        <p:spPr>
+          <a:xfrm>
+            <a:off x="822960" y="2350008"/>
+            <a:ext cx="4480560" cy="3346704"/>
+          </a:xfrm>
+          <a:prstGeom prst="rect">
+            <a:avLst/>
+          </a:prstGeom>
+          <a:noFill/>
+          <a:ln/>
+        </p:spPr>
+        <p:txBody>
+          <a:bodyPr wrap="square" lIns="0" tIns="0" rIns="0" bIns="0" rtlCol="0" anchor="t"/>
           <a:lstStyle/>
           <a:p>
             <a:pPr indent="0" marL="0">
               <a:lnSpc>
-                <a:spcPct val="130000"/>
+                <a:spcPct val="125000"/>
               </a:lnSpc>
               <a:buNone/>
             </a:pPr>
             <a:r>
-              <a:rPr lang="en-US" sz="2200" dirty="0">
+              <a:rPr lang="en-US" sz="1500" dirty="0">
+                <a:solidFill>
+                  <a:srgbClr val="101828"/>
+                </a:solidFill>
+                <a:latin typeface="IBM Plex Mono" pitchFamily="34" charset="0"/>
+                <a:ea typeface="IBM Plex Mono" pitchFamily="34" charset="-122"/>
+                <a:cs typeface="IBM Plex Mono" pitchFamily="34" charset="-120"/>
+              </a:rPr>
+              <a:t>f = open("notes.txt", "w")</a:t>
+            </a:r>
+            <a:endParaRPr lang="en-US" sz="1500" dirty="0"/>
+          </a:p>
+          <a:p>
+            <a:pPr indent="0" marL="0">
+              <a:lnSpc>
+                <a:spcPct val="125000"/>
+              </a:lnSpc>
+              <a:buNone/>
+            </a:pPr>
+            <a:r>
+              <a:rPr lang="en-US" sz="1500" dirty="0">
+                <a:solidFill>
+                  <a:srgbClr val="101828"/>
+                </a:solidFill>
+                <a:latin typeface="IBM Plex Mono" pitchFamily="34" charset="0"/>
+                <a:ea typeface="IBM Plex Mono" pitchFamily="34" charset="-122"/>
+                <a:cs typeface="IBM Plex Mono" pitchFamily="34" charset="-120"/>
+              </a:rPr>
+              <a:t>f.write("ridge\n")</a:t>
+            </a:r>
+            <a:endParaRPr lang="en-US" sz="1500" dirty="0"/>
+          </a:p>
+          <a:p>
+            <a:pPr indent="0" marL="0">
+              <a:lnSpc>
+                <a:spcPct val="125000"/>
+              </a:lnSpc>
+              <a:buNone/>
+            </a:pPr>
+            <a:r>
+              <a:rPr lang="en-US" sz="1500" dirty="0">
+                <a:solidFill>
+                  <a:srgbClr val="101828"/>
+                </a:solidFill>
+                <a:latin typeface="IBM Plex Mono" pitchFamily="34" charset="0"/>
+                <a:ea typeface="IBM Plex Mono" pitchFamily="34" charset="-122"/>
+                <a:cs typeface="IBM Plex Mono" pitchFamily="34" charset="-120"/>
+              </a:rPr>
+              <a:t>f.close()</a:t>
+            </a:r>
+            <a:endParaRPr lang="en-US" sz="1500" dirty="0"/>
+          </a:p>
+          <a:p>
+            <a:pPr indent="0" marL="0">
+              <a:lnSpc>
+                <a:spcPct val="125000"/>
+              </a:lnSpc>
+              <a:buNone/>
+            </a:pPr>
+            <a:r>
+              <a:rPr lang="en-US" sz="1500" dirty="0">
+                <a:solidFill>
+                  <a:srgbClr val="101828"/>
+                </a:solidFill>
+                <a:latin typeface="IBM Plex Mono" pitchFamily="34" charset="0"/>
+                <a:ea typeface="IBM Plex Mono" pitchFamily="34" charset="-122"/>
+                <a:cs typeface="IBM Plex Mono" pitchFamily="34" charset="-120"/>
+              </a:rPr>
+              <a:t>f = open("notes.txt", "a")</a:t>
+            </a:r>
+            <a:endParaRPr lang="en-US" sz="1500" dirty="0"/>
+          </a:p>
+          <a:p>
+            <a:pPr indent="0" marL="0">
+              <a:lnSpc>
+                <a:spcPct val="125000"/>
+              </a:lnSpc>
+              <a:buNone/>
+            </a:pPr>
+            <a:r>
+              <a:rPr lang="en-US" sz="1500" dirty="0">
+                <a:solidFill>
+                  <a:srgbClr val="101828"/>
+                </a:solidFill>
+                <a:latin typeface="IBM Plex Mono" pitchFamily="34" charset="0"/>
+                <a:ea typeface="IBM Plex Mono" pitchFamily="34" charset="-122"/>
+                <a:cs typeface="IBM Plex Mono" pitchFamily="34" charset="-120"/>
+              </a:rPr>
+              <a:t>f.write("hollow\n")</a:t>
+            </a:r>
+            <a:endParaRPr lang="en-US" sz="1500" dirty="0"/>
+          </a:p>
+          <a:p>
+            <a:pPr indent="0" marL="0">
+              <a:lnSpc>
+                <a:spcPct val="125000"/>
+              </a:lnSpc>
+              <a:buNone/>
+            </a:pPr>
+            <a:r>
+              <a:rPr lang="en-US" sz="1500" dirty="0">
+                <a:solidFill>
+                  <a:srgbClr val="101828"/>
+                </a:solidFill>
+                <a:latin typeface="IBM Plex Mono" pitchFamily="34" charset="0"/>
+                <a:ea typeface="IBM Plex Mono" pitchFamily="34" charset="-122"/>
+                <a:cs typeface="IBM Plex Mono" pitchFamily="34" charset="-120"/>
+              </a:rPr>
+              <a:t>f.close()</a:t>
+            </a:r>
+            <a:endParaRPr lang="en-US" sz="1500" dirty="0"/>
+          </a:p>
+          <a:p>
+            <a:pPr indent="0" marL="0">
+              <a:lnSpc>
+                <a:spcPct val="125000"/>
+              </a:lnSpc>
+              <a:buNone/>
+            </a:pPr>
+            <a:r>
+              <a:rPr lang="en-US" sz="1500" dirty="0">
+                <a:solidFill>
+                  <a:srgbClr val="101828"/>
+                </a:solidFill>
+                <a:latin typeface="IBM Plex Mono" pitchFamily="34" charset="0"/>
+                <a:ea typeface="IBM Plex Mono" pitchFamily="34" charset="-122"/>
+                <a:cs typeface="IBM Plex Mono" pitchFamily="34" charset="-120"/>
+              </a:rPr>
+              <a:t>f = open("notes.txt", "w")</a:t>
+            </a:r>
+            <a:endParaRPr lang="en-US" sz="1500" dirty="0"/>
+          </a:p>
+          <a:p>
+            <a:pPr indent="0" marL="0">
+              <a:lnSpc>
+                <a:spcPct val="125000"/>
+              </a:lnSpc>
+              <a:buNone/>
+            </a:pPr>
+            <a:r>
+              <a:rPr lang="en-US" sz="1500" dirty="0">
+                <a:solidFill>
+                  <a:srgbClr val="101828"/>
+                </a:solidFill>
+                <a:latin typeface="IBM Plex Mono" pitchFamily="34" charset="0"/>
+                <a:ea typeface="IBM Plex Mono" pitchFamily="34" charset="-122"/>
+                <a:cs typeface="IBM Plex Mono" pitchFamily="34" charset="-120"/>
+              </a:rPr>
+              <a:t>f.write("moss\n")</a:t>
+            </a:r>
+            <a:endParaRPr lang="en-US" sz="1500" dirty="0"/>
+          </a:p>
+          <a:p>
+            <a:pPr indent="0" marL="0">
+              <a:lnSpc>
+                <a:spcPct val="125000"/>
+              </a:lnSpc>
+              <a:buNone/>
+            </a:pPr>
+            <a:r>
+              <a:rPr lang="en-US" sz="1500" dirty="0">
+                <a:solidFill>
+                  <a:srgbClr val="101828"/>
+                </a:solidFill>
+                <a:latin typeface="IBM Plex Mono" pitchFamily="34" charset="0"/>
+                <a:ea typeface="IBM Plex Mono" pitchFamily="34" charset="-122"/>
+                <a:cs typeface="IBM Plex Mono" pitchFamily="34" charset="-120"/>
+              </a:rPr>
+              <a:t>f.close()</a:t>
+            </a:r>
+            <a:endParaRPr lang="en-US" sz="1500" dirty="0"/>
+          </a:p>
+          <a:p>
+            <a:pPr indent="0" marL="0">
+              <a:lnSpc>
+                <a:spcPct val="125000"/>
+              </a:lnSpc>
+              <a:buNone/>
+            </a:pPr>
+            <a:r>
+              <a:rPr lang="en-US" sz="1500" dirty="0">
+                <a:solidFill>
+                  <a:srgbClr val="101828"/>
+                </a:solidFill>
+                <a:latin typeface="IBM Plex Mono" pitchFamily="34" charset="0"/>
+                <a:ea typeface="IBM Plex Mono" pitchFamily="34" charset="-122"/>
+                <a:cs typeface="IBM Plex Mono" pitchFamily="34" charset="-120"/>
+              </a:rPr>
+              <a:t>f = open("notes.txt", "r")</a:t>
+            </a:r>
+            <a:endParaRPr lang="en-US" sz="1500" dirty="0"/>
+          </a:p>
+          <a:p>
+            <a:pPr indent="0" marL="0">
+              <a:lnSpc>
+                <a:spcPct val="125000"/>
+              </a:lnSpc>
+              <a:buNone/>
+            </a:pPr>
+            <a:r>
+              <a:rPr lang="en-US" sz="1500" dirty="0">
+                <a:solidFill>
+                  <a:srgbClr val="101828"/>
+                </a:solidFill>
+                <a:latin typeface="IBM Plex Mono" pitchFamily="34" charset="0"/>
+                <a:ea typeface="IBM Plex Mono" pitchFamily="34" charset="-122"/>
+                <a:cs typeface="IBM Plex Mono" pitchFamily="34" charset="-120"/>
+              </a:rPr>
+              <a:t>print(f.read())</a:t>
+            </a:r>
+            <a:endParaRPr lang="en-US" sz="1500" dirty="0"/>
+          </a:p>
+          <a:p>
+            <a:pPr indent="0" marL="0">
+              <a:lnSpc>
+                <a:spcPct val="125000"/>
+              </a:lnSpc>
+              <a:buNone/>
+            </a:pPr>
+            <a:r>
+              <a:rPr lang="en-US" sz="1500" dirty="0">
+                <a:solidFill>
+                  <a:srgbClr val="101828"/>
+                </a:solidFill>
+                <a:latin typeface="IBM Plex Mono" pitchFamily="34" charset="0"/>
+                <a:ea typeface="IBM Plex Mono" pitchFamily="34" charset="-122"/>
+                <a:cs typeface="IBM Plex Mono" pitchFamily="34" charset="-120"/>
+              </a:rPr>
+              <a:t>f.close()</a:t>
+            </a:r>
+            <a:endParaRPr lang="en-US" sz="1500" dirty="0"/>
+          </a:p>
+        </p:txBody>
+      </p:sp>
+      <p:sp>
+        <p:nvSpPr>
+          <p:cNvPr id="11" name="Shape 9"/>
+          <p:cNvSpPr/>
+          <p:nvPr/>
+        </p:nvSpPr>
+        <p:spPr>
+          <a:xfrm>
+            <a:off x="5806440" y="2148840"/>
+            <a:ext cx="5852160" cy="731520"/>
+          </a:xfrm>
+          <a:prstGeom prst="roundRect">
+            <a:avLst>
+              <a:gd name="adj" fmla="val 15000"/>
+            </a:avLst>
+          </a:prstGeom>
+          <a:solidFill>
+            <a:srgbClr val="FFFFFF"/>
+          </a:solidFill>
+          <a:ln w="15875">
+            <a:solidFill>
+              <a:srgbClr val="D9DEE7"/>
+            </a:solidFill>
+            <a:prstDash val="solid"/>
+          </a:ln>
+        </p:spPr>
+      </p:sp>
+      <p:sp>
+        <p:nvSpPr>
+          <p:cNvPr id="12" name="Shape 10"/>
+          <p:cNvSpPr/>
+          <p:nvPr/>
+        </p:nvSpPr>
+        <p:spPr>
+          <a:xfrm>
+            <a:off x="6080760" y="2295144"/>
+            <a:ext cx="438912" cy="438912"/>
+          </a:xfrm>
+          <a:prstGeom prst="roundRect">
+            <a:avLst>
+              <a:gd name="adj" fmla="val 20833"/>
+            </a:avLst>
+          </a:prstGeom>
+          <a:solidFill>
+            <a:srgbClr val="EEF2FB"/>
+          </a:solidFill>
+          <a:ln/>
+        </p:spPr>
+      </p:sp>
+      <p:sp>
+        <p:nvSpPr>
+          <p:cNvPr id="13" name="Text 11"/>
+          <p:cNvSpPr txBox="1"/>
+          <p:nvPr/>
+        </p:nvSpPr>
+        <p:spPr>
+          <a:xfrm>
+            <a:off x="6080760" y="2295144"/>
+            <a:ext cx="438912" cy="438912"/>
+          </a:xfrm>
+          <a:prstGeom prst="rect">
+            <a:avLst/>
+          </a:prstGeom>
+          <a:noFill/>
+          <a:ln/>
+        </p:spPr>
+        <p:txBody>
+          <a:bodyPr wrap="square" lIns="0" tIns="0" rIns="0" bIns="0" rtlCol="0" anchor="ctr"/>
+          <a:lstStyle/>
+          <a:p>
+            <a:pPr algn="ctr" indent="0" marL="0">
+              <a:buNone/>
+            </a:pPr>
+            <a:r>
+              <a:rPr lang="en-US" sz="1300" b="1" dirty="0">
+                <a:solidFill>
+                  <a:srgbClr val="2D63FF"/>
+                </a:solidFill>
+                <a:latin typeface="IBM Plex Mono" pitchFamily="34" charset="0"/>
+                <a:ea typeface="IBM Plex Mono" pitchFamily="34" charset="-122"/>
+                <a:cs typeface="IBM Plex Mono" pitchFamily="34" charset="-120"/>
+              </a:rPr>
+              <a:t>A</a:t>
+            </a:r>
+            <a:endParaRPr lang="en-US" sz="1300" dirty="0"/>
+          </a:p>
+        </p:txBody>
+      </p:sp>
+      <p:sp>
+        <p:nvSpPr>
+          <p:cNvPr id="14" name="Text 12"/>
+          <p:cNvSpPr txBox="1"/>
+          <p:nvPr/>
+        </p:nvSpPr>
+        <p:spPr>
+          <a:xfrm>
+            <a:off x="6720840" y="2148840"/>
+            <a:ext cx="4754880" cy="731520"/>
+          </a:xfrm>
+          <a:prstGeom prst="rect">
+            <a:avLst/>
+          </a:prstGeom>
+          <a:noFill/>
+          <a:ln/>
+        </p:spPr>
+        <p:txBody>
+          <a:bodyPr wrap="square" lIns="0" tIns="0" rIns="0" bIns="0" rtlCol="0" anchor="ctr"/>
+          <a:lstStyle/>
+          <a:p>
+            <a:pPr indent="0" marL="0">
+              <a:lnSpc>
+                <a:spcPct val="115000"/>
+              </a:lnSpc>
+              <a:buNone/>
+            </a:pPr>
+            <a:r>
+              <a:rPr lang="en-US" sz="1700" dirty="0">
                 <a:solidFill>
                   <a:srgbClr val="101828"/>
                 </a:solidFill>
@@ -3104,48 +3591,329 @@
                 <a:ea typeface="IBM Plex Sans" pitchFamily="34" charset="-122"/>
                 <a:cs typeface="IBM Plex Sans" pitchFamily="34" charset="-120"/>
               </a:rPr>
-              <a:t>Eight jobs are listed on the floor below you. Tap the star and choose the file mode each one needs.</a:t>
-            </a:r>
-            <a:endParaRPr lang="en-US" sz="2200" dirty="0"/>
-          </a:p>
-        </p:txBody>
-      </p:sp>
-      <p:sp>
-        <p:nvSpPr>
-          <p:cNvPr id="10" name="Text 8"/>
-          <p:cNvSpPr txBox="1"/>
-          <p:nvPr/>
-        </p:nvSpPr>
-        <p:spPr>
-          <a:xfrm>
-            <a:off x="502920" y="4526280"/>
-            <a:ext cx="11155680" cy="457200"/>
-          </a:xfrm>
-          <a:prstGeom prst="rect">
-            <a:avLst/>
-          </a:prstGeom>
-          <a:noFill/>
-          <a:ln/>
-        </p:spPr>
-        <p:txBody>
-          <a:bodyPr wrap="square" lIns="0" tIns="0" rIns="0" bIns="0" rtlCol="0" anchor="ctr"/>
-          <a:lstStyle/>
+              <a:t>ridge</a:t>
+            </a:r>
+            <a:endParaRPr lang="en-US" sz="1700" dirty="0"/>
+          </a:p>
           <a:p>
             <a:pPr indent="0" marL="0">
-              <a:buNone/>
-            </a:pPr>
-            <a:r>
-              <a:rPr lang="en-US" sz="1600" dirty="0">
-                <a:solidFill>
-                  <a:srgbClr val="667085"/>
+              <a:lnSpc>
+                <a:spcPct val="115000"/>
+              </a:lnSpc>
+              <a:buNone/>
+            </a:pPr>
+            <a:r>
+              <a:rPr lang="en-US" sz="1700" dirty="0">
+                <a:solidFill>
+                  <a:srgbClr val="101828"/>
                 </a:solidFill>
                 <a:latin typeface="IBM Plex Sans" pitchFamily="34" charset="0"/>
                 <a:ea typeface="IBM Plex Sans" pitchFamily="34" charset="-122"/>
                 <a:cs typeface="IBM Plex Sans" pitchFamily="34" charset="-120"/>
               </a:rPr>
-              <a:t>Predict on paper first, then look down and test it.</a:t>
-            </a:r>
-            <a:endParaRPr lang="en-US" sz="1600" dirty="0"/>
+              <a:t>hollow</a:t>
+            </a:r>
+            <a:endParaRPr lang="en-US" sz="1700" dirty="0"/>
+          </a:p>
+        </p:txBody>
+      </p:sp>
+      <p:sp>
+        <p:nvSpPr>
+          <p:cNvPr id="15" name="Shape 13"/>
+          <p:cNvSpPr/>
+          <p:nvPr/>
+        </p:nvSpPr>
+        <p:spPr>
+          <a:xfrm>
+            <a:off x="5806440" y="3017520"/>
+            <a:ext cx="5852160" cy="731520"/>
+          </a:xfrm>
+          <a:prstGeom prst="roundRect">
+            <a:avLst>
+              <a:gd name="adj" fmla="val 15000"/>
+            </a:avLst>
+          </a:prstGeom>
+          <a:solidFill>
+            <a:srgbClr val="FFFFFF"/>
+          </a:solidFill>
+          <a:ln w="15875">
+            <a:solidFill>
+              <a:srgbClr val="D9DEE7"/>
+            </a:solidFill>
+            <a:prstDash val="solid"/>
+          </a:ln>
+        </p:spPr>
+      </p:sp>
+      <p:sp>
+        <p:nvSpPr>
+          <p:cNvPr id="16" name="Shape 14"/>
+          <p:cNvSpPr/>
+          <p:nvPr/>
+        </p:nvSpPr>
+        <p:spPr>
+          <a:xfrm>
+            <a:off x="6080760" y="3163824"/>
+            <a:ext cx="438912" cy="438912"/>
+          </a:xfrm>
+          <a:prstGeom prst="roundRect">
+            <a:avLst>
+              <a:gd name="adj" fmla="val 20833"/>
+            </a:avLst>
+          </a:prstGeom>
+          <a:solidFill>
+            <a:srgbClr val="EEF2FB"/>
+          </a:solidFill>
+          <a:ln/>
+        </p:spPr>
+      </p:sp>
+      <p:sp>
+        <p:nvSpPr>
+          <p:cNvPr id="17" name="Text 15"/>
+          <p:cNvSpPr txBox="1"/>
+          <p:nvPr/>
+        </p:nvSpPr>
+        <p:spPr>
+          <a:xfrm>
+            <a:off x="6080760" y="3163824"/>
+            <a:ext cx="438912" cy="438912"/>
+          </a:xfrm>
+          <a:prstGeom prst="rect">
+            <a:avLst/>
+          </a:prstGeom>
+          <a:noFill/>
+          <a:ln/>
+        </p:spPr>
+        <p:txBody>
+          <a:bodyPr wrap="square" lIns="0" tIns="0" rIns="0" bIns="0" rtlCol="0" anchor="ctr"/>
+          <a:lstStyle/>
+          <a:p>
+            <a:pPr algn="ctr" indent="0" marL="0">
+              <a:buNone/>
+            </a:pPr>
+            <a:r>
+              <a:rPr lang="en-US" sz="1300" b="1" dirty="0">
+                <a:solidFill>
+                  <a:srgbClr val="2D63FF"/>
+                </a:solidFill>
+                <a:latin typeface="IBM Plex Mono" pitchFamily="34" charset="0"/>
+                <a:ea typeface="IBM Plex Mono" pitchFamily="34" charset="-122"/>
+                <a:cs typeface="IBM Plex Mono" pitchFamily="34" charset="-120"/>
+              </a:rPr>
+              <a:t>B</a:t>
+            </a:r>
+            <a:endParaRPr lang="en-US" sz="1300" dirty="0"/>
+          </a:p>
+        </p:txBody>
+      </p:sp>
+      <p:sp>
+        <p:nvSpPr>
+          <p:cNvPr id="18" name="Text 16"/>
+          <p:cNvSpPr txBox="1"/>
+          <p:nvPr/>
+        </p:nvSpPr>
+        <p:spPr>
+          <a:xfrm>
+            <a:off x="6720840" y="3017520"/>
+            <a:ext cx="4754880" cy="731520"/>
+          </a:xfrm>
+          <a:prstGeom prst="rect">
+            <a:avLst/>
+          </a:prstGeom>
+          <a:noFill/>
+          <a:ln/>
+        </p:spPr>
+        <p:txBody>
+          <a:bodyPr wrap="square" lIns="0" tIns="0" rIns="0" bIns="0" rtlCol="0" anchor="ctr"/>
+          <a:lstStyle/>
+          <a:p>
+            <a:pPr indent="0" marL="0">
+              <a:lnSpc>
+                <a:spcPct val="115000"/>
+              </a:lnSpc>
+              <a:buNone/>
+            </a:pPr>
+            <a:r>
+              <a:rPr lang="en-US" sz="1700" dirty="0">
+                <a:solidFill>
+                  <a:srgbClr val="101828"/>
+                </a:solidFill>
+                <a:latin typeface="IBM Plex Sans" pitchFamily="34" charset="0"/>
+                <a:ea typeface="IBM Plex Sans" pitchFamily="34" charset="-122"/>
+                <a:cs typeface="IBM Plex Sans" pitchFamily="34" charset="-120"/>
+              </a:rPr>
+              <a:t>moss</a:t>
+            </a:r>
+            <a:endParaRPr lang="en-US" sz="1700" dirty="0"/>
+          </a:p>
+        </p:txBody>
+      </p:sp>
+      <p:sp>
+        <p:nvSpPr>
+          <p:cNvPr id="19" name="Shape 17"/>
+          <p:cNvSpPr/>
+          <p:nvPr/>
+        </p:nvSpPr>
+        <p:spPr>
+          <a:xfrm>
+            <a:off x="5806440" y="3886200"/>
+            <a:ext cx="5852160" cy="731520"/>
+          </a:xfrm>
+          <a:prstGeom prst="roundRect">
+            <a:avLst>
+              <a:gd name="adj" fmla="val 15000"/>
+            </a:avLst>
+          </a:prstGeom>
+          <a:solidFill>
+            <a:srgbClr val="FFFFFF"/>
+          </a:solidFill>
+          <a:ln w="15875">
+            <a:solidFill>
+              <a:srgbClr val="D9DEE7"/>
+            </a:solidFill>
+            <a:prstDash val="solid"/>
+          </a:ln>
+        </p:spPr>
+      </p:sp>
+      <p:sp>
+        <p:nvSpPr>
+          <p:cNvPr id="20" name="Shape 18"/>
+          <p:cNvSpPr/>
+          <p:nvPr/>
+        </p:nvSpPr>
+        <p:spPr>
+          <a:xfrm>
+            <a:off x="6080760" y="4032504"/>
+            <a:ext cx="438912" cy="438912"/>
+          </a:xfrm>
+          <a:prstGeom prst="roundRect">
+            <a:avLst>
+              <a:gd name="adj" fmla="val 20833"/>
+            </a:avLst>
+          </a:prstGeom>
+          <a:solidFill>
+            <a:srgbClr val="EEF2FB"/>
+          </a:solidFill>
+          <a:ln/>
+        </p:spPr>
+      </p:sp>
+      <p:sp>
+        <p:nvSpPr>
+          <p:cNvPr id="21" name="Text 19"/>
+          <p:cNvSpPr txBox="1"/>
+          <p:nvPr/>
+        </p:nvSpPr>
+        <p:spPr>
+          <a:xfrm>
+            <a:off x="6080760" y="4032504"/>
+            <a:ext cx="438912" cy="438912"/>
+          </a:xfrm>
+          <a:prstGeom prst="rect">
+            <a:avLst/>
+          </a:prstGeom>
+          <a:noFill/>
+          <a:ln/>
+        </p:spPr>
+        <p:txBody>
+          <a:bodyPr wrap="square" lIns="0" tIns="0" rIns="0" bIns="0" rtlCol="0" anchor="ctr"/>
+          <a:lstStyle/>
+          <a:p>
+            <a:pPr algn="ctr" indent="0" marL="0">
+              <a:buNone/>
+            </a:pPr>
+            <a:r>
+              <a:rPr lang="en-US" sz="1300" b="1" dirty="0">
+                <a:solidFill>
+                  <a:srgbClr val="2D63FF"/>
+                </a:solidFill>
+                <a:latin typeface="IBM Plex Mono" pitchFamily="34" charset="0"/>
+                <a:ea typeface="IBM Plex Mono" pitchFamily="34" charset="-122"/>
+                <a:cs typeface="IBM Plex Mono" pitchFamily="34" charset="-120"/>
+              </a:rPr>
+              <a:t>C</a:t>
+            </a:r>
+            <a:endParaRPr lang="en-US" sz="1300" dirty="0"/>
+          </a:p>
+        </p:txBody>
+      </p:sp>
+      <p:sp>
+        <p:nvSpPr>
+          <p:cNvPr id="22" name="Text 20"/>
+          <p:cNvSpPr txBox="1"/>
+          <p:nvPr/>
+        </p:nvSpPr>
+        <p:spPr>
+          <a:xfrm>
+            <a:off x="6720840" y="3886200"/>
+            <a:ext cx="4754880" cy="731520"/>
+          </a:xfrm>
+          <a:prstGeom prst="rect">
+            <a:avLst/>
+          </a:prstGeom>
+          <a:noFill/>
+          <a:ln/>
+        </p:spPr>
+        <p:txBody>
+          <a:bodyPr wrap="square" lIns="0" tIns="0" rIns="0" bIns="0" rtlCol="0" anchor="ctr"/>
+          <a:lstStyle/>
+          <a:p>
+            <a:pPr indent="0" marL="0">
+              <a:lnSpc>
+                <a:spcPct val="115000"/>
+              </a:lnSpc>
+              <a:buNone/>
+            </a:pPr>
+            <a:r>
+              <a:rPr lang="en-US" sz="1700" dirty="0">
+                <a:solidFill>
+                  <a:srgbClr val="101828"/>
+                </a:solidFill>
+                <a:latin typeface="IBM Plex Sans" pitchFamily="34" charset="0"/>
+                <a:ea typeface="IBM Plex Sans" pitchFamily="34" charset="-122"/>
+                <a:cs typeface="IBM Plex Sans" pitchFamily="34" charset="-120"/>
+              </a:rPr>
+              <a:t>ridge</a:t>
+            </a:r>
+            <a:endParaRPr lang="en-US" sz="1700" dirty="0"/>
+          </a:p>
+          <a:p>
+            <a:pPr indent="0" marL="0">
+              <a:lnSpc>
+                <a:spcPct val="115000"/>
+              </a:lnSpc>
+              <a:buNone/>
+            </a:pPr>
+            <a:r>
+              <a:rPr lang="en-US" sz="1700" dirty="0">
+                <a:solidFill>
+                  <a:srgbClr val="101828"/>
+                </a:solidFill>
+                <a:latin typeface="IBM Plex Sans" pitchFamily="34" charset="0"/>
+                <a:ea typeface="IBM Plex Sans" pitchFamily="34" charset="-122"/>
+                <a:cs typeface="IBM Plex Sans" pitchFamily="34" charset="-120"/>
+              </a:rPr>
+              <a:t>hollow</a:t>
+            </a:r>
+            <a:endParaRPr lang="en-US" sz="1700" dirty="0"/>
+          </a:p>
+          <a:p>
+            <a:pPr indent="0" marL="0">
+              <a:lnSpc>
+                <a:spcPct val="115000"/>
+              </a:lnSpc>
+              <a:buNone/>
+            </a:pPr>
+            <a:r>
+              <a:rPr lang="en-US" sz="1700" dirty="0">
+                <a:solidFill>
+                  <a:srgbClr val="101828"/>
+                </a:solidFill>
+                <a:latin typeface="IBM Plex Sans" pitchFamily="34" charset="0"/>
+                <a:ea typeface="IBM Plex Sans" pitchFamily="34" charset="-122"/>
+                <a:cs typeface="IBM Plex Sans" pitchFamily="34" charset="-120"/>
+              </a:rPr>
+              <a:t>moss</a:t>
+            </a:r>
+            <a:endParaRPr lang="en-US" sz="1700" dirty="0"/>
           </a:p>
         </p:txBody>
       </p:sp>
@@ -3281,14 +4049,75 @@
       </p:sp>
       <p:sp>
         <p:nvSpPr>
-          <p:cNvPr id="5" name="Text 3"/>
-          <p:cNvSpPr txBox="1"/>
-          <p:nvPr/>
-        </p:nvSpPr>
-        <p:spPr>
-          <a:xfrm>
-            <a:off x="502920" y="411480"/>
-            <a:ext cx="11155680" cy="777240"/>
+          <p:cNvPr id="5" name="Shape 3"/>
+          <p:cNvSpPr/>
+          <p:nvPr/>
+        </p:nvSpPr>
+        <p:spPr>
+          <a:xfrm>
+            <a:off x="502920" y="438912"/>
+            <a:ext cx="3108960" cy="502920"/>
+          </a:xfrm>
+          <a:prstGeom prst="roundRect">
+            <a:avLst>
+              <a:gd name="adj" fmla="val 18182"/>
+            </a:avLst>
+          </a:prstGeom>
+          <a:solidFill>
+            <a:srgbClr val="F4B942"/>
+          </a:solidFill>
+          <a:ln/>
+        </p:spPr>
+      </p:sp>
+      <p:sp>
+        <p:nvSpPr>
+          <p:cNvPr id="6" name="Text 4"/>
+          <p:cNvSpPr txBox="1"/>
+          <p:nvPr/>
+        </p:nvSpPr>
+        <p:spPr>
+          <a:xfrm>
+            <a:off x="502920" y="438912"/>
+            <a:ext cx="3108960" cy="502920"/>
+          </a:xfrm>
+          <a:prstGeom prst="rect">
+            <a:avLst/>
+          </a:prstGeom>
+          <a:noFill/>
+          <a:ln/>
+        </p:spPr>
+        <p:txBody>
+          <a:bodyPr wrap="square" lIns="0" tIns="0" rIns="0" bIns="0" rtlCol="0" anchor="ctr"/>
+          <a:lstStyle/>
+          <a:p>
+            <a:pPr algn="ctr" indent="0" marL="0">
+              <a:buNone/>
+            </a:pPr>
+            <a:r>
+              <a:rPr lang="en-US" sz="1300" b="1" dirty="0">
+                <a:solidFill>
+                  <a:srgbClr val="101828"/>
+                </a:solidFill>
+                <a:latin typeface="IBM Plex Mono" pitchFamily="34" charset="0"/>
+                <a:ea typeface="IBM Plex Mono" pitchFamily="34" charset="-122"/>
+                <a:cs typeface="IBM Plex Mono" pitchFamily="34" charset="-120"/>
+              </a:rPr>
+              <a:t>★  FINAL CHALLENGE</a:t>
+            </a:r>
+            <a:endParaRPr lang="en-US" sz="1300" dirty="0"/>
+          </a:p>
+        </p:txBody>
+      </p:sp>
+      <p:sp>
+        <p:nvSpPr>
+          <p:cNvPr id="7" name="Text 5"/>
+          <p:cNvSpPr txBox="1"/>
+          <p:nvPr/>
+        </p:nvSpPr>
+        <p:spPr>
+          <a:xfrm>
+            <a:off x="502920" y="1097280"/>
+            <a:ext cx="11155680" cy="731520"/>
           </a:xfrm>
           <a:prstGeom prst="rect">
             <a:avLst/>
@@ -3304,7 +4133,7 @@
               <a:buNone/>
             </a:pPr>
             <a:r>
-              <a:rPr lang="en-US" sz="3200" b="1" dirty="0">
+              <a:rPr lang="en-US" sz="3400" b="1" dirty="0">
                 <a:solidFill>
                   <a:srgbClr val="101828"/>
                 </a:solidFill>
@@ -3312,65 +4141,26 @@
                 <a:ea typeface="IBM Plex Sans" pitchFamily="34" charset="-122"/>
                 <a:cs typeface="IBM Plex Sans" pitchFamily="34" charset="-120"/>
               </a:rPr>
-              <a:t>Worth knowing</a:t>
-            </a:r>
-            <a:endParaRPr lang="en-US" sz="3200" dirty="0"/>
-          </a:p>
-        </p:txBody>
-      </p:sp>
-      <p:sp>
-        <p:nvSpPr>
-          <p:cNvPr id="6" name="Text 4"/>
-          <p:cNvSpPr txBox="1"/>
-          <p:nvPr/>
-        </p:nvSpPr>
-        <p:spPr>
-          <a:xfrm>
-            <a:off x="502920" y="1170432"/>
-            <a:ext cx="11155680" cy="411480"/>
-          </a:xfrm>
-          <a:prstGeom prst="rect">
-            <a:avLst/>
-          </a:prstGeom>
-          <a:noFill/>
-          <a:ln/>
-        </p:spPr>
-        <p:txBody>
-          <a:bodyPr wrap="square" lIns="0" tIns="0" rIns="0" bIns="0" rtlCol="0" anchor="ctr"/>
-          <a:lstStyle/>
-          <a:p>
-            <a:pPr indent="0" marL="0">
-              <a:buNone/>
-            </a:pPr>
-            <a:r>
-              <a:rPr lang="en-US" sz="1500" dirty="0">
-                <a:solidFill>
-                  <a:srgbClr val="667085"/>
-                </a:solidFill>
-                <a:latin typeface="IBM Plex Sans" pitchFamily="34" charset="0"/>
-                <a:ea typeface="IBM Plex Sans" pitchFamily="34" charset="-122"/>
-                <a:cs typeface="IBM Plex Sans" pitchFamily="34" charset="-120"/>
-              </a:rPr>
-              <a:t>The information markers dotted around the room</a:t>
-            </a:r>
-            <a:endParaRPr lang="en-US" sz="1500" dirty="0"/>
-          </a:p>
-        </p:txBody>
-      </p:sp>
-      <p:sp>
-        <p:nvSpPr>
-          <p:cNvPr id="7" name="Shape 5"/>
+              <a:t>Which mode?</a:t>
+            </a:r>
+            <a:endParaRPr lang="en-US" sz="3400" dirty="0"/>
+          </a:p>
+        </p:txBody>
+      </p:sp>
+      <p:sp>
+        <p:nvSpPr>
+          <p:cNvPr id="8" name="Shape 6"/>
           <p:cNvSpPr/>
           <p:nvPr/>
         </p:nvSpPr>
         <p:spPr>
           <a:xfrm>
-            <a:off x="502920" y="1828800"/>
-            <a:ext cx="5394960" cy="1737360"/>
+            <a:off x="502920" y="2011680"/>
+            <a:ext cx="11155680" cy="2194560"/>
           </a:xfrm>
           <a:prstGeom prst="roundRect">
             <a:avLst>
-              <a:gd name="adj" fmla="val 6316"/>
+              <a:gd name="adj" fmla="val 5000"/>
             </a:avLst>
           </a:prstGeom>
           <a:solidFill>
@@ -3386,14 +4176,14 @@
       </p:sp>
       <p:sp>
         <p:nvSpPr>
-          <p:cNvPr id="8" name="Text 6"/>
-          <p:cNvSpPr txBox="1"/>
-          <p:nvPr/>
-        </p:nvSpPr>
-        <p:spPr>
-          <a:xfrm>
-            <a:off x="822960" y="2011680"/>
-            <a:ext cx="4754880" cy="365760"/>
+          <p:cNvPr id="9" name="Text 7"/>
+          <p:cNvSpPr txBox="1"/>
+          <p:nvPr/>
+        </p:nvSpPr>
+        <p:spPr>
+          <a:xfrm>
+            <a:off x="1005840" y="2331720"/>
+            <a:ext cx="10149840" cy="1554480"/>
           </a:xfrm>
           <a:prstGeom prst="rect">
             <a:avLst/>
@@ -3406,52 +4196,52 @@
           <a:lstStyle/>
           <a:p>
             <a:pPr indent="0" marL="0">
-              <a:buNone/>
-            </a:pPr>
-            <a:r>
-              <a:rPr lang="en-US" sz="1600" b="1" dirty="0">
-                <a:solidFill>
-                  <a:srgbClr val="2D63FF"/>
+              <a:lnSpc>
+                <a:spcPct val="130000"/>
+              </a:lnSpc>
+              <a:buNone/>
+            </a:pPr>
+            <a:r>
+              <a:rPr lang="en-US" sz="2200" dirty="0">
+                <a:solidFill>
+                  <a:srgbClr val="101828"/>
                 </a:solidFill>
                 <a:latin typeface="IBM Plex Sans" pitchFamily="34" charset="0"/>
                 <a:ea typeface="IBM Plex Sans" pitchFamily="34" charset="-122"/>
                 <a:cs typeface="IBM Plex Sans" pitchFamily="34" charset="-120"/>
               </a:rPr>
-              <a:t>Where it looks</a:t>
-            </a:r>
-            <a:endParaRPr lang="en-US" sz="1600" dirty="0"/>
-          </a:p>
-        </p:txBody>
-      </p:sp>
-      <p:sp>
-        <p:nvSpPr>
-          <p:cNvPr id="9" name="Text 7"/>
-          <p:cNvSpPr txBox="1"/>
-          <p:nvPr/>
-        </p:nvSpPr>
-        <p:spPr>
-          <a:xfrm>
-            <a:off x="822960" y="2395728"/>
-            <a:ext cx="4754880" cy="1005840"/>
-          </a:xfrm>
-          <a:prstGeom prst="rect">
-            <a:avLst/>
-          </a:prstGeom>
-          <a:noFill/>
-          <a:ln/>
-        </p:spPr>
-        <p:txBody>
-          <a:bodyPr wrap="square" lIns="0" tIns="0" rIns="0" bIns="0" rtlCol="0" anchor="t"/>
+              <a:t>Eight jobs are listed on the floor below you. Tap the star and choose the file mode each one needs.</a:t>
+            </a:r>
+            <a:endParaRPr lang="en-US" sz="2200" dirty="0"/>
+          </a:p>
+        </p:txBody>
+      </p:sp>
+      <p:sp>
+        <p:nvSpPr>
+          <p:cNvPr id="10" name="Text 8"/>
+          <p:cNvSpPr txBox="1"/>
+          <p:nvPr/>
+        </p:nvSpPr>
+        <p:spPr>
+          <a:xfrm>
+            <a:off x="502920" y="4526280"/>
+            <a:ext cx="11155680" cy="457200"/>
+          </a:xfrm>
+          <a:prstGeom prst="rect">
+            <a:avLst/>
+          </a:prstGeom>
+          <a:noFill/>
+          <a:ln/>
+        </p:spPr>
+        <p:txBody>
+          <a:bodyPr wrap="square" lIns="0" tIns="0" rIns="0" bIns="0" rtlCol="0" anchor="ctr"/>
           <a:lstStyle/>
           <a:p>
             <a:pPr indent="0" marL="0">
-              <a:lnSpc>
-                <a:spcPct val="120000"/>
-              </a:lnSpc>
-              <a:buNone/>
-            </a:pPr>
-            <a:r>
-              <a:rPr lang="en-US" sz="1300" dirty="0">
+              <a:buNone/>
+            </a:pPr>
+            <a:r>
+              <a:rPr lang="en-US" sz="1600" dirty="0">
                 <a:solidFill>
                   <a:srgbClr val="667085"/>
                 </a:solidFill>
@@ -3459,333 +4249,9 @@
                 <a:ea typeface="IBM Plex Sans" pitchFamily="34" charset="-122"/>
                 <a:cs typeface="IBM Plex Sans" pitchFamily="34" charset="-120"/>
               </a:rPr>
-              <a:t>A program looks for a file in the folder it is running in, unless you give it a fuller path.</a:t>
-            </a:r>
-            <a:endParaRPr lang="en-US" sz="1300" dirty="0"/>
-          </a:p>
-        </p:txBody>
-      </p:sp>
-      <p:sp>
-        <p:nvSpPr>
-          <p:cNvPr id="10" name="Shape 8"/>
-          <p:cNvSpPr/>
-          <p:nvPr/>
-        </p:nvSpPr>
-        <p:spPr>
-          <a:xfrm>
-            <a:off x="6217920" y="1828800"/>
-            <a:ext cx="5394960" cy="1737360"/>
-          </a:xfrm>
-          <a:prstGeom prst="roundRect">
-            <a:avLst>
-              <a:gd name="adj" fmla="val 6316"/>
-            </a:avLst>
-          </a:prstGeom>
-          <a:solidFill>
-            <a:srgbClr val="FFFFFF"/>
-          </a:solidFill>
-          <a:ln w="15875">
-            <a:solidFill>
-              <a:srgbClr val="08A6A6"/>
-            </a:solidFill>
-            <a:prstDash val="solid"/>
-          </a:ln>
-        </p:spPr>
-      </p:sp>
-      <p:sp>
-        <p:nvSpPr>
-          <p:cNvPr id="11" name="Text 9"/>
-          <p:cNvSpPr txBox="1"/>
-          <p:nvPr/>
-        </p:nvSpPr>
-        <p:spPr>
-          <a:xfrm>
-            <a:off x="6537960" y="2011680"/>
-            <a:ext cx="4754880" cy="365760"/>
-          </a:xfrm>
-          <a:prstGeom prst="rect">
-            <a:avLst/>
-          </a:prstGeom>
-          <a:noFill/>
-          <a:ln/>
-        </p:spPr>
-        <p:txBody>
-          <a:bodyPr wrap="square" lIns="0" tIns="0" rIns="0" bIns="0" rtlCol="0" anchor="ctr"/>
-          <a:lstStyle/>
-          <a:p>
-            <a:pPr indent="0" marL="0">
-              <a:buNone/>
-            </a:pPr>
-            <a:r>
-              <a:rPr lang="en-US" sz="1600" b="1" dirty="0">
-                <a:solidFill>
-                  <a:srgbClr val="08A6A6"/>
-                </a:solidFill>
-                <a:latin typeface="IBM Plex Sans" pitchFamily="34" charset="0"/>
-                <a:ea typeface="IBM Plex Sans" pitchFamily="34" charset="-122"/>
-                <a:cs typeface="IBM Plex Sans" pitchFamily="34" charset="-120"/>
-              </a:rPr>
-              <a:t>One line at a time</a:t>
+              <a:t>Predict on paper first, then look down and test it.</a:t>
             </a:r>
             <a:endParaRPr lang="en-US" sz="1600" dirty="0"/>
-          </a:p>
-        </p:txBody>
-      </p:sp>
-      <p:sp>
-        <p:nvSpPr>
-          <p:cNvPr id="12" name="Text 10"/>
-          <p:cNvSpPr txBox="1"/>
-          <p:nvPr/>
-        </p:nvSpPr>
-        <p:spPr>
-          <a:xfrm>
-            <a:off x="6537960" y="2395728"/>
-            <a:ext cx="4754880" cy="1005840"/>
-          </a:xfrm>
-          <a:prstGeom prst="rect">
-            <a:avLst/>
-          </a:prstGeom>
-          <a:noFill/>
-          <a:ln/>
-        </p:spPr>
-        <p:txBody>
-          <a:bodyPr wrap="square" lIns="0" tIns="0" rIns="0" bIns="0" rtlCol="0" anchor="t"/>
-          <a:lstStyle/>
-          <a:p>
-            <a:pPr indent="0" marL="0">
-              <a:lnSpc>
-                <a:spcPct val="120000"/>
-              </a:lnSpc>
-              <a:buNone/>
-            </a:pPr>
-            <a:r>
-              <a:rPr lang="en-US" sz="1300" dirty="0">
-                <a:solidFill>
-                  <a:srgbClr val="667085"/>
-                </a:solidFill>
-                <a:latin typeface="IBM Plex Sans" pitchFamily="34" charset="0"/>
-                <a:ea typeface="IBM Plex Sans" pitchFamily="34" charset="-122"/>
-                <a:cs typeface="IBM Plex Sans" pitchFamily="34" charset="-120"/>
-              </a:rPr>
-              <a:t>Looping straight over the file object reads it a line at a time, which matters when a file is too big to fit in memory.</a:t>
-            </a:r>
-            <a:endParaRPr lang="en-US" sz="1300" dirty="0"/>
-          </a:p>
-        </p:txBody>
-      </p:sp>
-      <p:sp>
-        <p:nvSpPr>
-          <p:cNvPr id="13" name="Shape 11"/>
-          <p:cNvSpPr/>
-          <p:nvPr/>
-        </p:nvSpPr>
-        <p:spPr>
-          <a:xfrm>
-            <a:off x="502920" y="3794760"/>
-            <a:ext cx="5394960" cy="1737360"/>
-          </a:xfrm>
-          <a:prstGeom prst="roundRect">
-            <a:avLst>
-              <a:gd name="adj" fmla="val 6316"/>
-            </a:avLst>
-          </a:prstGeom>
-          <a:solidFill>
-            <a:srgbClr val="FFFFFF"/>
-          </a:solidFill>
-          <a:ln w="15875">
-            <a:solidFill>
-              <a:srgbClr val="2D63FF"/>
-            </a:solidFill>
-            <a:prstDash val="solid"/>
-          </a:ln>
-        </p:spPr>
-      </p:sp>
-      <p:sp>
-        <p:nvSpPr>
-          <p:cNvPr id="14" name="Text 12"/>
-          <p:cNvSpPr txBox="1"/>
-          <p:nvPr/>
-        </p:nvSpPr>
-        <p:spPr>
-          <a:xfrm>
-            <a:off x="822960" y="3977640"/>
-            <a:ext cx="4754880" cy="365760"/>
-          </a:xfrm>
-          <a:prstGeom prst="rect">
-            <a:avLst/>
-          </a:prstGeom>
-          <a:noFill/>
-          <a:ln/>
-        </p:spPr>
-        <p:txBody>
-          <a:bodyPr wrap="square" lIns="0" tIns="0" rIns="0" bIns="0" rtlCol="0" anchor="ctr"/>
-          <a:lstStyle/>
-          <a:p>
-            <a:pPr indent="0" marL="0">
-              <a:buNone/>
-            </a:pPr>
-            <a:r>
-              <a:rPr lang="en-US" sz="1600" b="1" dirty="0">
-                <a:solidFill>
-                  <a:srgbClr val="2D63FF"/>
-                </a:solidFill>
-                <a:latin typeface="IBM Plex Sans" pitchFamily="34" charset="0"/>
-                <a:ea typeface="IBM Plex Sans" pitchFamily="34" charset="-122"/>
-                <a:cs typeface="IBM Plex Sans" pitchFamily="34" charset="-120"/>
-              </a:rPr>
-              <a:t>No undo</a:t>
-            </a:r>
-            <a:endParaRPr lang="en-US" sz="1600" dirty="0"/>
-          </a:p>
-        </p:txBody>
-      </p:sp>
-      <p:sp>
-        <p:nvSpPr>
-          <p:cNvPr id="15" name="Text 13"/>
-          <p:cNvSpPr txBox="1"/>
-          <p:nvPr/>
-        </p:nvSpPr>
-        <p:spPr>
-          <a:xfrm>
-            <a:off x="822960" y="4361688"/>
-            <a:ext cx="4754880" cy="1005840"/>
-          </a:xfrm>
-          <a:prstGeom prst="rect">
-            <a:avLst/>
-          </a:prstGeom>
-          <a:noFill/>
-          <a:ln/>
-        </p:spPr>
-        <p:txBody>
-          <a:bodyPr wrap="square" lIns="0" tIns="0" rIns="0" bIns="0" rtlCol="0" anchor="t"/>
-          <a:lstStyle/>
-          <a:p>
-            <a:pPr indent="0" marL="0">
-              <a:lnSpc>
-                <a:spcPct val="120000"/>
-              </a:lnSpc>
-              <a:buNone/>
-            </a:pPr>
-            <a:r>
-              <a:rPr lang="en-US" sz="1300" dirty="0">
-                <a:solidFill>
-                  <a:srgbClr val="667085"/>
-                </a:solidFill>
-                <a:latin typeface="IBM Plex Sans" pitchFamily="34" charset="0"/>
-                <a:ea typeface="IBM Plex Sans" pitchFamily="34" charset="-122"/>
-                <a:cs typeface="IBM Plex Sans" pitchFamily="34" charset="-120"/>
-              </a:rPr>
-              <a:t>Write mode empties the file the instant it opens, before you have written anything at all.</a:t>
-            </a:r>
-            <a:endParaRPr lang="en-US" sz="1300" dirty="0"/>
-          </a:p>
-        </p:txBody>
-      </p:sp>
-      <p:sp>
-        <p:nvSpPr>
-          <p:cNvPr id="16" name="Shape 14"/>
-          <p:cNvSpPr/>
-          <p:nvPr/>
-        </p:nvSpPr>
-        <p:spPr>
-          <a:xfrm>
-            <a:off x="6217920" y="3794760"/>
-            <a:ext cx="5394960" cy="1737360"/>
-          </a:xfrm>
-          <a:prstGeom prst="roundRect">
-            <a:avLst>
-              <a:gd name="adj" fmla="val 6316"/>
-            </a:avLst>
-          </a:prstGeom>
-          <a:solidFill>
-            <a:srgbClr val="FFFFFF"/>
-          </a:solidFill>
-          <a:ln w="15875">
-            <a:solidFill>
-              <a:srgbClr val="08A6A6"/>
-            </a:solidFill>
-            <a:prstDash val="solid"/>
-          </a:ln>
-        </p:spPr>
-      </p:sp>
-      <p:sp>
-        <p:nvSpPr>
-          <p:cNvPr id="17" name="Text 15"/>
-          <p:cNvSpPr txBox="1"/>
-          <p:nvPr/>
-        </p:nvSpPr>
-        <p:spPr>
-          <a:xfrm>
-            <a:off x="6537960" y="3977640"/>
-            <a:ext cx="4754880" cy="365760"/>
-          </a:xfrm>
-          <a:prstGeom prst="rect">
-            <a:avLst/>
-          </a:prstGeom>
-          <a:noFill/>
-          <a:ln/>
-        </p:spPr>
-        <p:txBody>
-          <a:bodyPr wrap="square" lIns="0" tIns="0" rIns="0" bIns="0" rtlCol="0" anchor="ctr"/>
-          <a:lstStyle/>
-          <a:p>
-            <a:pPr indent="0" marL="0">
-              <a:buNone/>
-            </a:pPr>
-            <a:r>
-              <a:rPr lang="en-US" sz="1600" b="1" dirty="0">
-                <a:solidFill>
-                  <a:srgbClr val="08A6A6"/>
-                </a:solidFill>
-                <a:latin typeface="IBM Plex Sans" pitchFamily="34" charset="0"/>
-                <a:ea typeface="IBM Plex Sans" pitchFamily="34" charset="-122"/>
-                <a:cs typeface="IBM Plex Sans" pitchFamily="34" charset="-120"/>
-              </a:rPr>
-              <a:t>Why append exists</a:t>
-            </a:r>
-            <a:endParaRPr lang="en-US" sz="1600" dirty="0"/>
-          </a:p>
-        </p:txBody>
-      </p:sp>
-      <p:sp>
-        <p:nvSpPr>
-          <p:cNvPr id="18" name="Text 16"/>
-          <p:cNvSpPr txBox="1"/>
-          <p:nvPr/>
-        </p:nvSpPr>
-        <p:spPr>
-          <a:xfrm>
-            <a:off x="6537960" y="4361688"/>
-            <a:ext cx="4754880" cy="1005840"/>
-          </a:xfrm>
-          <a:prstGeom prst="rect">
-            <a:avLst/>
-          </a:prstGeom>
-          <a:noFill/>
-          <a:ln/>
-        </p:spPr>
-        <p:txBody>
-          <a:bodyPr wrap="square" lIns="0" tIns="0" rIns="0" bIns="0" rtlCol="0" anchor="t"/>
-          <a:lstStyle/>
-          <a:p>
-            <a:pPr indent="0" marL="0">
-              <a:lnSpc>
-                <a:spcPct val="120000"/>
-              </a:lnSpc>
-              <a:buNone/>
-            </a:pPr>
-            <a:r>
-              <a:rPr lang="en-US" sz="1300" dirty="0">
-                <a:solidFill>
-                  <a:srgbClr val="667085"/>
-                </a:solidFill>
-                <a:latin typeface="IBM Plex Sans" pitchFamily="34" charset="0"/>
-                <a:ea typeface="IBM Plex Sans" pitchFamily="34" charset="-122"/>
-                <a:cs typeface="IBM Plex Sans" pitchFamily="34" charset="-120"/>
-              </a:rPr>
-              <a:t>Append mode adds to the end without touching a single line already in the file. That is what makes it the safe mode for a file that is added to over and over.</a:t>
-            </a:r>
-            <a:endParaRPr lang="en-US" sz="1300" dirty="0"/>
           </a:p>
         </p:txBody>
       </p:sp>
@@ -3952,7 +4418,7 @@
                 <a:ea typeface="IBM Plex Sans" pitchFamily="34" charset="-122"/>
                 <a:cs typeface="IBM Plex Sans" pitchFamily="34" charset="-120"/>
               </a:rPr>
-              <a:t>Exam practice</a:t>
+              <a:t>Worth knowing</a:t>
             </a:r>
             <a:endParaRPr lang="en-US" sz="3200" dirty="0"/>
           </a:p>
@@ -3991,7 +4457,7 @@
                 <a:ea typeface="IBM Plex Sans" pitchFamily="34" charset="-122"/>
                 <a:cs typeface="IBM Plex Sans" pitchFamily="34" charset="-120"/>
               </a:rPr>
-              <a:t>Devices away. Answer from memory on the worksheet.</a:t>
+              <a:t>The information markers dotted around the room</a:t>
             </a:r>
             <a:endParaRPr lang="en-US" sz="1500" dirty="0"/>
           </a:p>
@@ -4006,11 +4472,11 @@
         <p:spPr>
           <a:xfrm>
             <a:off x="502920" y="1828800"/>
-            <a:ext cx="11155680" cy="1097280"/>
+            <a:ext cx="5394960" cy="1737360"/>
           </a:xfrm>
           <a:prstGeom prst="roundRect">
             <a:avLst>
-              <a:gd name="adj" fmla="val 10000"/>
+              <a:gd name="adj" fmla="val 6316"/>
             </a:avLst>
           </a:prstGeom>
           <a:solidFill>
@@ -4018,7 +4484,7 @@
           </a:solidFill>
           <a:ln w="15875">
             <a:solidFill>
-              <a:srgbClr val="D9DEE7"/>
+              <a:srgbClr val="2D63FF"/>
             </a:solidFill>
             <a:prstDash val="solid"/>
           </a:ln>
@@ -4032,8 +4498,8 @@
         </p:nvSpPr>
         <p:spPr>
           <a:xfrm>
-            <a:off x="914400" y="1938528"/>
-            <a:ext cx="9418320" cy="877824"/>
+            <a:off x="822960" y="2011680"/>
+            <a:ext cx="4754880" cy="365760"/>
           </a:xfrm>
           <a:prstGeom prst="rect">
             <a:avLst/>
@@ -4046,169 +4512,79 @@
           <a:lstStyle/>
           <a:p>
             <a:pPr indent="0" marL="0">
-              <a:lnSpc>
-                <a:spcPct val="118000"/>
-              </a:lnSpc>
-              <a:buNone/>
-            </a:pPr>
-            <a:r>
-              <a:rPr lang="en-US" sz="1700" dirty="0">
-                <a:solidFill>
-                  <a:srgbClr val="101828"/>
+              <a:buNone/>
+            </a:pPr>
+            <a:r>
+              <a:rPr lang="en-US" sz="1600" b="1" dirty="0">
+                <a:solidFill>
+                  <a:srgbClr val="2D63FF"/>
                 </a:solidFill>
                 <a:latin typeface="IBM Plex Sans" pitchFamily="34" charset="0"/>
                 <a:ea typeface="IBM Plex Sans" pitchFamily="34" charset="-122"/>
                 <a:cs typeface="IBM Plex Sans" pitchFamily="34" charset="-120"/>
               </a:rPr>
-              <a:t>Every line read from a file is measured with </a:t>
-            </a:r>
+              <a:t>Where it looks</a:t>
+            </a:r>
+            <a:endParaRPr lang="en-US" sz="1600" dirty="0"/>
+          </a:p>
+        </p:txBody>
+      </p:sp>
+      <p:sp>
+        <p:nvSpPr>
+          <p:cNvPr id="9" name="Text 7"/>
+          <p:cNvSpPr txBox="1"/>
+          <p:nvPr/>
+        </p:nvSpPr>
+        <p:spPr>
+          <a:xfrm>
+            <a:off x="822960" y="2395728"/>
+            <a:ext cx="4754880" cy="1005840"/>
+          </a:xfrm>
+          <a:prstGeom prst="rect">
+            <a:avLst/>
+          </a:prstGeom>
+          <a:noFill/>
+          <a:ln/>
+        </p:spPr>
+        <p:txBody>
+          <a:bodyPr wrap="square" lIns="0" tIns="0" rIns="0" bIns="0" rtlCol="0" anchor="t"/>
+          <a:lstStyle/>
+          <a:p>
             <a:pPr indent="0" marL="0">
               <a:lnSpc>
-                <a:spcPct val="118000"/>
+                <a:spcPct val="120000"/>
               </a:lnSpc>
               <a:buNone/>
             </a:pPr>
             <a:r>
-              <a:rPr lang="en-US" sz="1700" dirty="0">
-                <a:solidFill>
-                  <a:srgbClr val="1D4ED8"/>
-                </a:solidFill>
-                <a:latin typeface="IBM Plex Mono" pitchFamily="34" charset="0"/>
-                <a:ea typeface="IBM Plex Mono" pitchFamily="34" charset="-122"/>
-                <a:cs typeface="IBM Plex Mono" pitchFamily="34" charset="-120"/>
-              </a:rPr>
-              <a:t>len</a:t>
-            </a:r>
-            <a:pPr indent="0" marL="0">
-              <a:lnSpc>
-                <a:spcPct val="118000"/>
-              </a:lnSpc>
-              <a:buNone/>
-            </a:pPr>
-            <a:r>
-              <a:rPr lang="en-US" sz="1700" dirty="0">
-                <a:solidFill>
-                  <a:srgbClr val="3F3F46"/>
-                </a:solidFill>
-                <a:latin typeface="IBM Plex Mono" pitchFamily="34" charset="0"/>
-                <a:ea typeface="IBM Plex Mono" pitchFamily="34" charset="-122"/>
-                <a:cs typeface="IBM Plex Mono" pitchFamily="34" charset="-120"/>
-              </a:rPr>
-              <a:t>(</a:t>
-            </a:r>
-            <a:pPr indent="0" marL="0">
-              <a:lnSpc>
-                <a:spcPct val="118000"/>
-              </a:lnSpc>
-              <a:buNone/>
-            </a:pPr>
-            <a:r>
-              <a:rPr lang="en-US" sz="1700" dirty="0">
-                <a:solidFill>
-                  <a:srgbClr val="3F3F46"/>
-                </a:solidFill>
-                <a:latin typeface="IBM Plex Mono" pitchFamily="34" charset="0"/>
-                <a:ea typeface="IBM Plex Mono" pitchFamily="34" charset="-122"/>
-                <a:cs typeface="IBM Plex Mono" pitchFamily="34" charset="-120"/>
-              </a:rPr>
-              <a:t>)</a:t>
-            </a:r>
-            <a:pPr indent="0" marL="0">
-              <a:lnSpc>
-                <a:spcPct val="118000"/>
-              </a:lnSpc>
-              <a:buNone/>
-            </a:pPr>
-            <a:r>
-              <a:rPr lang="en-US" sz="1700" dirty="0">
-                <a:solidFill>
-                  <a:srgbClr val="101828"/>
+              <a:rPr lang="en-US" sz="1300" dirty="0">
+                <a:solidFill>
+                  <a:srgbClr val="667085"/>
                 </a:solidFill>
                 <a:latin typeface="IBM Plex Sans" pitchFamily="34" charset="0"/>
                 <a:ea typeface="IBM Plex Sans" pitchFamily="34" charset="-122"/>
                 <a:cs typeface="IBM Plex Sans" pitchFamily="34" charset="-120"/>
               </a:rPr>
-              <a:t>, and each answer comes out one character bigger than expected. Name the character being counted, and write the line that removes it.</a:t>
-            </a:r>
-            <a:endParaRPr lang="en-US" sz="1700" dirty="0"/>
-          </a:p>
-        </p:txBody>
-      </p:sp>
-      <p:sp>
-        <p:nvSpPr>
-          <p:cNvPr id="9" name="Shape 7"/>
+              <a:t>A program looks for a file in the folder it is running in, unless you give it a fuller path.</a:t>
+            </a:r>
+            <a:endParaRPr lang="en-US" sz="1300" dirty="0"/>
+          </a:p>
+        </p:txBody>
+      </p:sp>
+      <p:sp>
+        <p:nvSpPr>
+          <p:cNvPr id="10" name="Shape 8"/>
           <p:cNvSpPr/>
           <p:nvPr/>
         </p:nvSpPr>
         <p:spPr>
           <a:xfrm>
-            <a:off x="10515600" y="2130552"/>
-            <a:ext cx="868680" cy="493776"/>
+            <a:off x="6217920" y="1828800"/>
+            <a:ext cx="5394960" cy="1737360"/>
           </a:xfrm>
           <a:prstGeom prst="roundRect">
             <a:avLst>
-              <a:gd name="adj" fmla="val 18519"/>
-            </a:avLst>
-          </a:prstGeom>
-          <a:solidFill>
-            <a:srgbClr val="EEF2FB"/>
-          </a:solidFill>
-          <a:ln/>
-        </p:spPr>
-      </p:sp>
-      <p:sp>
-        <p:nvSpPr>
-          <p:cNvPr id="10" name="Text 8"/>
-          <p:cNvSpPr txBox="1"/>
-          <p:nvPr/>
-        </p:nvSpPr>
-        <p:spPr>
-          <a:xfrm>
-            <a:off x="10515600" y="2130552"/>
-            <a:ext cx="868680" cy="493776"/>
-          </a:xfrm>
-          <a:prstGeom prst="rect">
-            <a:avLst/>
-          </a:prstGeom>
-          <a:noFill/>
-          <a:ln/>
-        </p:spPr>
-        <p:txBody>
-          <a:bodyPr wrap="square" lIns="0" tIns="0" rIns="0" bIns="0" rtlCol="0" anchor="ctr"/>
-          <a:lstStyle/>
-          <a:p>
-            <a:pPr algn="ctr" indent="0" marL="0">
-              <a:buNone/>
-            </a:pPr>
-            <a:r>
-              <a:rPr lang="en-US" sz="1500" b="1" dirty="0">
-                <a:solidFill>
-                  <a:srgbClr val="2D63FF"/>
-                </a:solidFill>
-                <a:latin typeface="IBM Plex Mono" pitchFamily="34" charset="0"/>
-                <a:ea typeface="IBM Plex Mono" pitchFamily="34" charset="-122"/>
-                <a:cs typeface="IBM Plex Mono" pitchFamily="34" charset="-120"/>
-              </a:rPr>
-              <a:t>[2]</a:t>
-            </a:r>
-            <a:endParaRPr lang="en-US" sz="1500" dirty="0"/>
-          </a:p>
-        </p:txBody>
-      </p:sp>
-      <p:sp>
-        <p:nvSpPr>
-          <p:cNvPr id="11" name="Shape 9"/>
-          <p:cNvSpPr/>
-          <p:nvPr/>
-        </p:nvSpPr>
-        <p:spPr>
-          <a:xfrm>
-            <a:off x="502920" y="3127248"/>
-            <a:ext cx="11155680" cy="1097280"/>
-          </a:xfrm>
-          <a:prstGeom prst="roundRect">
-            <a:avLst>
-              <a:gd name="adj" fmla="val 10000"/>
+              <a:gd name="adj" fmla="val 6316"/>
             </a:avLst>
           </a:prstGeom>
           <a:solidFill>
@@ -4216,7 +4592,7 @@
           </a:solidFill>
           <a:ln w="15875">
             <a:solidFill>
-              <a:srgbClr val="D9DEE7"/>
+              <a:srgbClr val="08A6A6"/>
             </a:solidFill>
             <a:prstDash val="solid"/>
           </a:ln>
@@ -4224,14 +4600,14 @@
       </p:sp>
       <p:sp>
         <p:nvSpPr>
-          <p:cNvPr id="12" name="Text 10"/>
-          <p:cNvSpPr txBox="1"/>
-          <p:nvPr/>
-        </p:nvSpPr>
-        <p:spPr>
-          <a:xfrm>
-            <a:off x="914400" y="3236976"/>
-            <a:ext cx="9418320" cy="877824"/>
+          <p:cNvPr id="11" name="Text 9"/>
+          <p:cNvSpPr txBox="1"/>
+          <p:nvPr/>
+        </p:nvSpPr>
+        <p:spPr>
+          <a:xfrm>
+            <a:off x="6537960" y="2011680"/>
+            <a:ext cx="4754880" cy="365760"/>
           </a:xfrm>
           <a:prstGeom prst="rect">
             <a:avLst/>
@@ -4244,57 +4620,62 @@
           <a:lstStyle/>
           <a:p>
             <a:pPr indent="0" marL="0">
-              <a:lnSpc>
-                <a:spcPct val="118000"/>
-              </a:lnSpc>
-              <a:buNone/>
-            </a:pPr>
-            <a:r>
-              <a:rPr lang="en-US" sz="1700" dirty="0">
-                <a:solidFill>
-                  <a:srgbClr val="101828"/>
+              <a:buNone/>
+            </a:pPr>
+            <a:r>
+              <a:rPr lang="en-US" sz="1600" b="1" dirty="0">
+                <a:solidFill>
+                  <a:srgbClr val="08A6A6"/>
                 </a:solidFill>
                 <a:latin typeface="IBM Plex Sans" pitchFamily="34" charset="0"/>
                 <a:ea typeface="IBM Plex Sans" pitchFamily="34" charset="-122"/>
                 <a:cs typeface="IBM Plex Sans" pitchFamily="34" charset="-120"/>
               </a:rPr>
-              <a:t>Write a program that reads a word and adds it onto the end of </a:t>
-            </a:r>
+              <a:t>One line at a time</a:t>
+            </a:r>
+            <a:endParaRPr lang="en-US" sz="1600" dirty="0"/>
+          </a:p>
+        </p:txBody>
+      </p:sp>
+      <p:sp>
+        <p:nvSpPr>
+          <p:cNvPr id="12" name="Text 10"/>
+          <p:cNvSpPr txBox="1"/>
+          <p:nvPr/>
+        </p:nvSpPr>
+        <p:spPr>
+          <a:xfrm>
+            <a:off x="6537960" y="2395728"/>
+            <a:ext cx="4754880" cy="1005840"/>
+          </a:xfrm>
+          <a:prstGeom prst="rect">
+            <a:avLst/>
+          </a:prstGeom>
+          <a:noFill/>
+          <a:ln/>
+        </p:spPr>
+        <p:txBody>
+          <a:bodyPr wrap="square" lIns="0" tIns="0" rIns="0" bIns="0" rtlCol="0" anchor="t"/>
+          <a:lstStyle/>
+          <a:p>
             <a:pPr indent="0" marL="0">
               <a:lnSpc>
-                <a:spcPct val="118000"/>
+                <a:spcPct val="120000"/>
               </a:lnSpc>
               <a:buNone/>
             </a:pPr>
             <a:r>
-              <a:rPr lang="en-US" sz="1700" dirty="0">
-                <a:solidFill>
-                  <a:srgbClr val="15803D"/>
-                </a:solidFill>
-                <a:latin typeface="IBM Plex Mono" pitchFamily="34" charset="0"/>
-                <a:ea typeface="IBM Plex Mono" pitchFamily="34" charset="-122"/>
-                <a:cs typeface="IBM Plex Mono" pitchFamily="34" charset="-120"/>
-              </a:rPr>
-              <a:t>"log.txt"</a:t>
-            </a:r>
-            <a:pPr indent="0" marL="0">
-              <a:lnSpc>
-                <a:spcPct val="118000"/>
-              </a:lnSpc>
-              <a:buNone/>
-            </a:pPr>
-            <a:r>
-              <a:rPr lang="en-US" sz="1700" dirty="0">
-                <a:solidFill>
-                  <a:srgbClr val="101828"/>
+              <a:rPr lang="en-US" sz="1300" dirty="0">
+                <a:solidFill>
+                  <a:srgbClr val="667085"/>
                 </a:solidFill>
                 <a:latin typeface="IBM Plex Sans" pitchFamily="34" charset="0"/>
                 <a:ea typeface="IBM Plex Sans" pitchFamily="34" charset="-122"/>
                 <a:cs typeface="IBM Plex Sans" pitchFamily="34" charset="-120"/>
               </a:rPr>
-              <a:t> on a line of its own, without losing the lines already in the file, then prints every line of the file.</a:t>
-            </a:r>
-            <a:endParaRPr lang="en-US" sz="1700" dirty="0"/>
+              <a:t>Looping straight over the file object reads it a line at a time, which matters when a file is too big to fit in memory.</a:t>
+            </a:r>
+            <a:endParaRPr lang="en-US" sz="1300" dirty="0"/>
           </a:p>
         </p:txBody>
       </p:sp>
@@ -4306,73 +4687,12 @@
         </p:nvSpPr>
         <p:spPr>
           <a:xfrm>
-            <a:off x="10515600" y="3429000"/>
-            <a:ext cx="868680" cy="493776"/>
+            <a:off x="502920" y="3794760"/>
+            <a:ext cx="5394960" cy="1737360"/>
           </a:xfrm>
           <a:prstGeom prst="roundRect">
             <a:avLst>
-              <a:gd name="adj" fmla="val 18519"/>
-            </a:avLst>
-          </a:prstGeom>
-          <a:solidFill>
-            <a:srgbClr val="EEF2FB"/>
-          </a:solidFill>
-          <a:ln/>
-        </p:spPr>
-      </p:sp>
-      <p:sp>
-        <p:nvSpPr>
-          <p:cNvPr id="14" name="Text 12"/>
-          <p:cNvSpPr txBox="1"/>
-          <p:nvPr/>
-        </p:nvSpPr>
-        <p:spPr>
-          <a:xfrm>
-            <a:off x="10515600" y="3429000"/>
-            <a:ext cx="868680" cy="493776"/>
-          </a:xfrm>
-          <a:prstGeom prst="rect">
-            <a:avLst/>
-          </a:prstGeom>
-          <a:noFill/>
-          <a:ln/>
-        </p:spPr>
-        <p:txBody>
-          <a:bodyPr wrap="square" lIns="0" tIns="0" rIns="0" bIns="0" rtlCol="0" anchor="ctr"/>
-          <a:lstStyle/>
-          <a:p>
-            <a:pPr algn="ctr" indent="0" marL="0">
-              <a:buNone/>
-            </a:pPr>
-            <a:r>
-              <a:rPr lang="en-US" sz="1500" b="1" dirty="0">
-                <a:solidFill>
-                  <a:srgbClr val="2D63FF"/>
-                </a:solidFill>
-                <a:latin typeface="IBM Plex Mono" pitchFamily="34" charset="0"/>
-                <a:ea typeface="IBM Plex Mono" pitchFamily="34" charset="-122"/>
-                <a:cs typeface="IBM Plex Mono" pitchFamily="34" charset="-120"/>
-              </a:rPr>
-              <a:t>[4]</a:t>
-            </a:r>
-            <a:endParaRPr lang="en-US" sz="1500" dirty="0"/>
-          </a:p>
-        </p:txBody>
-      </p:sp>
-      <p:sp>
-        <p:nvSpPr>
-          <p:cNvPr id="15" name="Shape 13"/>
-          <p:cNvSpPr/>
-          <p:nvPr/>
-        </p:nvSpPr>
-        <p:spPr>
-          <a:xfrm>
-            <a:off x="502920" y="4425696"/>
-            <a:ext cx="11155680" cy="1097280"/>
-          </a:xfrm>
-          <a:prstGeom prst="roundRect">
-            <a:avLst>
-              <a:gd name="adj" fmla="val 10000"/>
+              <a:gd name="adj" fmla="val 6316"/>
             </a:avLst>
           </a:prstGeom>
           <a:solidFill>
@@ -4380,7 +4700,7 @@
           </a:solidFill>
           <a:ln w="15875">
             <a:solidFill>
-              <a:srgbClr val="D9DEE7"/>
+              <a:srgbClr val="2D63FF"/>
             </a:solidFill>
             <a:prstDash val="solid"/>
           </a:ln>
@@ -4388,14 +4708,14 @@
       </p:sp>
       <p:sp>
         <p:nvSpPr>
-          <p:cNvPr id="16" name="Text 14"/>
-          <p:cNvSpPr txBox="1"/>
-          <p:nvPr/>
-        </p:nvSpPr>
-        <p:spPr>
-          <a:xfrm>
-            <a:off x="914400" y="4535424"/>
-            <a:ext cx="9418320" cy="877824"/>
+          <p:cNvPr id="14" name="Text 12"/>
+          <p:cNvSpPr txBox="1"/>
+          <p:nvPr/>
+        </p:nvSpPr>
+        <p:spPr>
+          <a:xfrm>
+            <a:off x="822960" y="3977640"/>
+            <a:ext cx="4754880" cy="365760"/>
           </a:xfrm>
           <a:prstGeom prst="rect">
             <a:avLst/>
@@ -4408,81 +4728,130 @@
           <a:lstStyle/>
           <a:p>
             <a:pPr indent="0" marL="0">
-              <a:lnSpc>
-                <a:spcPct val="118000"/>
-              </a:lnSpc>
-              <a:buNone/>
-            </a:pPr>
-            <a:r>
-              <a:rPr lang="en-US" sz="1700" dirty="0">
-                <a:solidFill>
-                  <a:srgbClr val="101828"/>
+              <a:buNone/>
+            </a:pPr>
+            <a:r>
+              <a:rPr lang="en-US" sz="1600" b="1" dirty="0">
+                <a:solidFill>
+                  <a:srgbClr val="2D63FF"/>
                 </a:solidFill>
                 <a:latin typeface="IBM Plex Sans" pitchFamily="34" charset="0"/>
                 <a:ea typeface="IBM Plex Sans" pitchFamily="34" charset="-122"/>
                 <a:cs typeface="IBM Plex Sans" pitchFamily="34" charset="-120"/>
               </a:rPr>
-              <a:t>Each line of </a:t>
-            </a:r>
+              <a:t>No undo</a:t>
+            </a:r>
+            <a:endParaRPr lang="en-US" sz="1600" dirty="0"/>
+          </a:p>
+        </p:txBody>
+      </p:sp>
+      <p:sp>
+        <p:nvSpPr>
+          <p:cNvPr id="15" name="Text 13"/>
+          <p:cNvSpPr txBox="1"/>
+          <p:nvPr/>
+        </p:nvSpPr>
+        <p:spPr>
+          <a:xfrm>
+            <a:off x="822960" y="4361688"/>
+            <a:ext cx="4754880" cy="1005840"/>
+          </a:xfrm>
+          <a:prstGeom prst="rect">
+            <a:avLst/>
+          </a:prstGeom>
+          <a:noFill/>
+          <a:ln/>
+        </p:spPr>
+        <p:txBody>
+          <a:bodyPr wrap="square" lIns="0" tIns="0" rIns="0" bIns="0" rtlCol="0" anchor="t"/>
+          <a:lstStyle/>
+          <a:p>
             <a:pPr indent="0" marL="0">
               <a:lnSpc>
-                <a:spcPct val="118000"/>
+                <a:spcPct val="120000"/>
               </a:lnSpc>
               <a:buNone/>
             </a:pPr>
             <a:r>
-              <a:rPr lang="en-US" sz="1700" dirty="0">
-                <a:solidFill>
-                  <a:srgbClr val="15803D"/>
-                </a:solidFill>
-                <a:latin typeface="IBM Plex Mono" pitchFamily="34" charset="0"/>
-                <a:ea typeface="IBM Plex Mono" pitchFamily="34" charset="-122"/>
-                <a:cs typeface="IBM Plex Mono" pitchFamily="34" charset="-120"/>
-              </a:rPr>
-              <a:t>"data.txt"</a:t>
-            </a:r>
-            <a:pPr indent="0" marL="0">
-              <a:lnSpc>
-                <a:spcPct val="118000"/>
-              </a:lnSpc>
-              <a:buNone/>
-            </a:pPr>
-            <a:r>
-              <a:rPr lang="en-US" sz="1700" dirty="0">
-                <a:solidFill>
-                  <a:srgbClr val="101828"/>
+              <a:rPr lang="en-US" sz="1300" dirty="0">
+                <a:solidFill>
+                  <a:srgbClr val="667085"/>
                 </a:solidFill>
                 <a:latin typeface="IBM Plex Sans" pitchFamily="34" charset="0"/>
                 <a:ea typeface="IBM Plex Sans" pitchFamily="34" charset="-122"/>
                 <a:cs typeface="IBM Plex Sans" pitchFamily="34" charset="-120"/>
               </a:rPr>
-              <a:t> holds a word and a whole number, separated by a comma. Write a program that prints the word from every line whose number is 16 or more.</a:t>
-            </a:r>
-            <a:endParaRPr lang="en-US" sz="1700" dirty="0"/>
-          </a:p>
-        </p:txBody>
-      </p:sp>
-      <p:sp>
-        <p:nvSpPr>
-          <p:cNvPr id="17" name="Shape 15"/>
+              <a:t>Write mode empties the file the instant it opens, before you have written anything at all.</a:t>
+            </a:r>
+            <a:endParaRPr lang="en-US" sz="1300" dirty="0"/>
+          </a:p>
+        </p:txBody>
+      </p:sp>
+      <p:sp>
+        <p:nvSpPr>
+          <p:cNvPr id="16" name="Shape 14"/>
           <p:cNvSpPr/>
           <p:nvPr/>
         </p:nvSpPr>
         <p:spPr>
           <a:xfrm>
-            <a:off x="10515600" y="4727448"/>
-            <a:ext cx="868680" cy="493776"/>
+            <a:off x="6217920" y="3794760"/>
+            <a:ext cx="5394960" cy="1737360"/>
           </a:xfrm>
           <a:prstGeom prst="roundRect">
             <a:avLst>
-              <a:gd name="adj" fmla="val 18519"/>
+              <a:gd name="adj" fmla="val 6316"/>
             </a:avLst>
           </a:prstGeom>
           <a:solidFill>
-            <a:srgbClr val="EEF2FB"/>
+            <a:srgbClr val="FFFFFF"/>
           </a:solidFill>
-          <a:ln/>
-        </p:spPr>
+          <a:ln w="15875">
+            <a:solidFill>
+              <a:srgbClr val="08A6A6"/>
+            </a:solidFill>
+            <a:prstDash val="solid"/>
+          </a:ln>
+        </p:spPr>
+      </p:sp>
+      <p:sp>
+        <p:nvSpPr>
+          <p:cNvPr id="17" name="Text 15"/>
+          <p:cNvSpPr txBox="1"/>
+          <p:nvPr/>
+        </p:nvSpPr>
+        <p:spPr>
+          <a:xfrm>
+            <a:off x="6537960" y="3977640"/>
+            <a:ext cx="4754880" cy="365760"/>
+          </a:xfrm>
+          <a:prstGeom prst="rect">
+            <a:avLst/>
+          </a:prstGeom>
+          <a:noFill/>
+          <a:ln/>
+        </p:spPr>
+        <p:txBody>
+          <a:bodyPr wrap="square" lIns="0" tIns="0" rIns="0" bIns="0" rtlCol="0" anchor="ctr"/>
+          <a:lstStyle/>
+          <a:p>
+            <a:pPr indent="0" marL="0">
+              <a:buNone/>
+            </a:pPr>
+            <a:r>
+              <a:rPr lang="en-US" sz="1600" b="1" dirty="0">
+                <a:solidFill>
+                  <a:srgbClr val="08A6A6"/>
+                </a:solidFill>
+                <a:latin typeface="IBM Plex Sans" pitchFamily="34" charset="0"/>
+                <a:ea typeface="IBM Plex Sans" pitchFamily="34" charset="-122"/>
+                <a:cs typeface="IBM Plex Sans" pitchFamily="34" charset="-120"/>
+              </a:rPr>
+              <a:t>Why append exists</a:t>
+            </a:r>
+            <a:endParaRPr lang="en-US" sz="1600" dirty="0"/>
+          </a:p>
+        </p:txBody>
       </p:sp>
       <p:sp>
         <p:nvSpPr>
@@ -4492,34 +4861,37 @@
         </p:nvSpPr>
         <p:spPr>
           <a:xfrm>
-            <a:off x="10515600" y="4727448"/>
-            <a:ext cx="868680" cy="493776"/>
-          </a:xfrm>
-          <a:prstGeom prst="rect">
-            <a:avLst/>
-          </a:prstGeom>
-          <a:noFill/>
-          <a:ln/>
-        </p:spPr>
-        <p:txBody>
-          <a:bodyPr wrap="square" lIns="0" tIns="0" rIns="0" bIns="0" rtlCol="0" anchor="ctr"/>
-          <a:lstStyle/>
-          <a:p>
-            <a:pPr algn="ctr" indent="0" marL="0">
-              <a:buNone/>
-            </a:pPr>
-            <a:r>
-              <a:rPr lang="en-US" sz="1500" b="1" dirty="0">
-                <a:solidFill>
-                  <a:srgbClr val="2D63FF"/>
-                </a:solidFill>
-                <a:latin typeface="IBM Plex Mono" pitchFamily="34" charset="0"/>
-                <a:ea typeface="IBM Plex Mono" pitchFamily="34" charset="-122"/>
-                <a:cs typeface="IBM Plex Mono" pitchFamily="34" charset="-120"/>
-              </a:rPr>
-              <a:t>[5]</a:t>
-            </a:r>
-            <a:endParaRPr lang="en-US" sz="1500" dirty="0"/>
+            <a:off x="6537960" y="4361688"/>
+            <a:ext cx="4754880" cy="1005840"/>
+          </a:xfrm>
+          <a:prstGeom prst="rect">
+            <a:avLst/>
+          </a:prstGeom>
+          <a:noFill/>
+          <a:ln/>
+        </p:spPr>
+        <p:txBody>
+          <a:bodyPr wrap="square" lIns="0" tIns="0" rIns="0" bIns="0" rtlCol="0" anchor="t"/>
+          <a:lstStyle/>
+          <a:p>
+            <a:pPr indent="0" marL="0">
+              <a:lnSpc>
+                <a:spcPct val="120000"/>
+              </a:lnSpc>
+              <a:buNone/>
+            </a:pPr>
+            <a:r>
+              <a:rPr lang="en-US" sz="1300" dirty="0">
+                <a:solidFill>
+                  <a:srgbClr val="667085"/>
+                </a:solidFill>
+                <a:latin typeface="IBM Plex Sans" pitchFamily="34" charset="0"/>
+                <a:ea typeface="IBM Plex Sans" pitchFamily="34" charset="-122"/>
+                <a:cs typeface="IBM Plex Sans" pitchFamily="34" charset="-120"/>
+              </a:rPr>
+              <a:t>Append mode adds to the end without touching a single line already in the file. That is what makes it the safe mode for a file that is added to over and over.</a:t>
+            </a:r>
+            <a:endParaRPr lang="en-US" sz="1300" dirty="0"/>
           </a:p>
         </p:txBody>
       </p:sp>
@@ -4534,6 +4906,740 @@
 <file path=ppt/slides/slide14.xml><?xml version="1.0" encoding="utf-8"?>
 <p:sld xmlns:a="http://schemas.openxmlformats.org/drawingml/2006/main" xmlns:r="http://schemas.openxmlformats.org/officeDocument/2006/relationships" xmlns:p="http://schemas.openxmlformats.org/presentationml/2006/main">
   <p:cSld name="Slide 14">
+    <p:bg>
+      <p:bgPr>
+        <a:solidFill>
+          <a:srgbClr val="F7F7F4"/>
+        </a:solidFill>
+      </p:bgPr>
+    </p:bg>
+    <p:spTree>
+      <p:nvGrpSpPr>
+        <p:cNvPr id="1" name=""/>
+        <p:cNvGrpSpPr/>
+        <p:nvPr/>
+      </p:nvGrpSpPr>
+      <p:grpSpPr>
+        <a:xfrm>
+          <a:off x="0" y="0"/>
+          <a:ext cx="0" cy="0"/>
+          <a:chOff x="0" y="0"/>
+          <a:chExt cx="0" cy="0"/>
+        </a:xfrm>
+      </p:grpSpPr>
+      <p:sp>
+        <p:nvSpPr>
+          <p:cNvPr id="2" name="Shape 0"/>
+          <p:cNvSpPr/>
+          <p:nvPr/>
+        </p:nvSpPr>
+        <p:spPr>
+          <a:xfrm>
+            <a:off x="0" y="0"/>
+            <a:ext cx="12188952" cy="82296"/>
+          </a:xfrm>
+          <a:prstGeom prst="rect">
+            <a:avLst/>
+          </a:prstGeom>
+          <a:solidFill>
+            <a:srgbClr val="2D63FF"/>
+          </a:solidFill>
+          <a:ln/>
+        </p:spPr>
+      </p:sp>
+      <p:sp>
+        <p:nvSpPr>
+          <p:cNvPr id="3" name="Text 1"/>
+          <p:cNvSpPr txBox="1"/>
+          <p:nvPr/>
+        </p:nvSpPr>
+        <p:spPr>
+          <a:xfrm>
+            <a:off x="502920" y="6236208"/>
+            <a:ext cx="7772400" cy="365760"/>
+          </a:xfrm>
+          <a:prstGeom prst="rect">
+            <a:avLst/>
+          </a:prstGeom>
+          <a:noFill/>
+          <a:ln/>
+        </p:spPr>
+        <p:txBody>
+          <a:bodyPr wrap="square" lIns="0" tIns="0" rIns="0" bIns="0" rtlCol="0" anchor="ctr"/>
+          <a:lstStyle/>
+          <a:p>
+            <a:pPr indent="0" marL="0">
+              <a:buNone/>
+            </a:pPr>
+            <a:r>
+              <a:rPr lang="en-US" sz="1100" dirty="0">
+                <a:solidFill>
+                  <a:srgbClr val="667085"/>
+                </a:solidFill>
+                <a:latin typeface="IBM Plex Mono" pitchFamily="34" charset="0"/>
+                <a:ea typeface="IBM Plex Mono" pitchFamily="34" charset="-122"/>
+                <a:cs typeface="IBM Plex Mono" pitchFamily="34" charset="-120"/>
+              </a:rPr>
+              <a:t>Python programming  |  Lesson 10</a:t>
+            </a:r>
+            <a:endParaRPr lang="en-US" sz="1100" dirty="0"/>
+          </a:p>
+        </p:txBody>
+      </p:sp>
+      <p:sp>
+        <p:nvSpPr>
+          <p:cNvPr id="4" name="Text 2"/>
+          <p:cNvSpPr txBox="1"/>
+          <p:nvPr/>
+        </p:nvSpPr>
+        <p:spPr>
+          <a:xfrm>
+            <a:off x="9326880" y="6236208"/>
+            <a:ext cx="2377440" cy="365760"/>
+          </a:xfrm>
+          <a:prstGeom prst="rect">
+            <a:avLst/>
+          </a:prstGeom>
+          <a:noFill/>
+          <a:ln/>
+        </p:spPr>
+        <p:txBody>
+          <a:bodyPr wrap="square" lIns="0" tIns="0" rIns="0" bIns="0" rtlCol="0" anchor="ctr"/>
+          <a:lstStyle/>
+          <a:p>
+            <a:pPr algn="r" indent="0" marL="0">
+              <a:buNone/>
+            </a:pPr>
+            <a:r>
+              <a:rPr lang="en-US" sz="1100" dirty="0">
+                <a:solidFill>
+                  <a:srgbClr val="667085"/>
+                </a:solidFill>
+                <a:latin typeface="IBM Plex Mono" pitchFamily="34" charset="0"/>
+                <a:ea typeface="IBM Plex Mono" pitchFamily="34" charset="-122"/>
+                <a:cs typeface="IBM Plex Mono" pitchFamily="34" charset="-120"/>
+              </a:rPr>
+              <a:t>Revise 360</a:t>
+            </a:r>
+            <a:endParaRPr lang="en-US" sz="1100" dirty="0"/>
+          </a:p>
+        </p:txBody>
+      </p:sp>
+      <p:sp>
+        <p:nvSpPr>
+          <p:cNvPr id="5" name="Text 3"/>
+          <p:cNvSpPr txBox="1"/>
+          <p:nvPr/>
+        </p:nvSpPr>
+        <p:spPr>
+          <a:xfrm>
+            <a:off x="502920" y="411480"/>
+            <a:ext cx="11155680" cy="777240"/>
+          </a:xfrm>
+          <a:prstGeom prst="rect">
+            <a:avLst/>
+          </a:prstGeom>
+          <a:noFill/>
+          <a:ln/>
+        </p:spPr>
+        <p:txBody>
+          <a:bodyPr wrap="square" lIns="0" tIns="0" rIns="0" bIns="0" rtlCol="0" anchor="ctr"/>
+          <a:lstStyle/>
+          <a:p>
+            <a:pPr indent="0" marL="0">
+              <a:buNone/>
+            </a:pPr>
+            <a:r>
+              <a:rPr lang="en-US" sz="3200" b="1" dirty="0">
+                <a:solidFill>
+                  <a:srgbClr val="101828"/>
+                </a:solidFill>
+                <a:latin typeface="IBM Plex Sans" pitchFamily="34" charset="0"/>
+                <a:ea typeface="IBM Plex Sans" pitchFamily="34" charset="-122"/>
+                <a:cs typeface="IBM Plex Sans" pitchFamily="34" charset="-120"/>
+              </a:rPr>
+              <a:t>Exam practice</a:t>
+            </a:r>
+            <a:endParaRPr lang="en-US" sz="3200" dirty="0"/>
+          </a:p>
+        </p:txBody>
+      </p:sp>
+      <p:sp>
+        <p:nvSpPr>
+          <p:cNvPr id="6" name="Text 4"/>
+          <p:cNvSpPr txBox="1"/>
+          <p:nvPr/>
+        </p:nvSpPr>
+        <p:spPr>
+          <a:xfrm>
+            <a:off x="502920" y="1170432"/>
+            <a:ext cx="11155680" cy="411480"/>
+          </a:xfrm>
+          <a:prstGeom prst="rect">
+            <a:avLst/>
+          </a:prstGeom>
+          <a:noFill/>
+          <a:ln/>
+        </p:spPr>
+        <p:txBody>
+          <a:bodyPr wrap="square" lIns="0" tIns="0" rIns="0" bIns="0" rtlCol="0" anchor="ctr"/>
+          <a:lstStyle/>
+          <a:p>
+            <a:pPr indent="0" marL="0">
+              <a:buNone/>
+            </a:pPr>
+            <a:r>
+              <a:rPr lang="en-US" sz="1500" dirty="0">
+                <a:solidFill>
+                  <a:srgbClr val="667085"/>
+                </a:solidFill>
+                <a:latin typeface="IBM Plex Sans" pitchFamily="34" charset="0"/>
+                <a:ea typeface="IBM Plex Sans" pitchFamily="34" charset="-122"/>
+                <a:cs typeface="IBM Plex Sans" pitchFamily="34" charset="-120"/>
+              </a:rPr>
+              <a:t>Devices away. Answer from memory on the worksheet.</a:t>
+            </a:r>
+            <a:endParaRPr lang="en-US" sz="1500" dirty="0"/>
+          </a:p>
+        </p:txBody>
+      </p:sp>
+      <p:sp>
+        <p:nvSpPr>
+          <p:cNvPr id="7" name="Shape 5"/>
+          <p:cNvSpPr/>
+          <p:nvPr/>
+        </p:nvSpPr>
+        <p:spPr>
+          <a:xfrm>
+            <a:off x="502920" y="1828800"/>
+            <a:ext cx="11155680" cy="1097280"/>
+          </a:xfrm>
+          <a:prstGeom prst="roundRect">
+            <a:avLst>
+              <a:gd name="adj" fmla="val 10000"/>
+            </a:avLst>
+          </a:prstGeom>
+          <a:solidFill>
+            <a:srgbClr val="FFFFFF"/>
+          </a:solidFill>
+          <a:ln w="15875">
+            <a:solidFill>
+              <a:srgbClr val="D9DEE7"/>
+            </a:solidFill>
+            <a:prstDash val="solid"/>
+          </a:ln>
+        </p:spPr>
+      </p:sp>
+      <p:sp>
+        <p:nvSpPr>
+          <p:cNvPr id="8" name="Text 6"/>
+          <p:cNvSpPr txBox="1"/>
+          <p:nvPr/>
+        </p:nvSpPr>
+        <p:spPr>
+          <a:xfrm>
+            <a:off x="914400" y="1938528"/>
+            <a:ext cx="9418320" cy="877824"/>
+          </a:xfrm>
+          <a:prstGeom prst="rect">
+            <a:avLst/>
+          </a:prstGeom>
+          <a:noFill/>
+          <a:ln/>
+        </p:spPr>
+        <p:txBody>
+          <a:bodyPr wrap="square" lIns="0" tIns="0" rIns="0" bIns="0" rtlCol="0" anchor="ctr"/>
+          <a:lstStyle/>
+          <a:p>
+            <a:pPr indent="0" marL="0">
+              <a:lnSpc>
+                <a:spcPct val="118000"/>
+              </a:lnSpc>
+              <a:buNone/>
+            </a:pPr>
+            <a:r>
+              <a:rPr lang="en-US" sz="1700" dirty="0">
+                <a:solidFill>
+                  <a:srgbClr val="101828"/>
+                </a:solidFill>
+                <a:latin typeface="IBM Plex Sans" pitchFamily="34" charset="0"/>
+                <a:ea typeface="IBM Plex Sans" pitchFamily="34" charset="-122"/>
+                <a:cs typeface="IBM Plex Sans" pitchFamily="34" charset="-120"/>
+              </a:rPr>
+              <a:t>Every line read from a file is measured with </a:t>
+            </a:r>
+            <a:pPr indent="0" marL="0">
+              <a:lnSpc>
+                <a:spcPct val="118000"/>
+              </a:lnSpc>
+              <a:buNone/>
+            </a:pPr>
+            <a:r>
+              <a:rPr lang="en-US" sz="1700" dirty="0">
+                <a:solidFill>
+                  <a:srgbClr val="1D4ED8"/>
+                </a:solidFill>
+                <a:latin typeface="IBM Plex Mono" pitchFamily="34" charset="0"/>
+                <a:ea typeface="IBM Plex Mono" pitchFamily="34" charset="-122"/>
+                <a:cs typeface="IBM Plex Mono" pitchFamily="34" charset="-120"/>
+              </a:rPr>
+              <a:t>len</a:t>
+            </a:r>
+            <a:pPr indent="0" marL="0">
+              <a:lnSpc>
+                <a:spcPct val="118000"/>
+              </a:lnSpc>
+              <a:buNone/>
+            </a:pPr>
+            <a:r>
+              <a:rPr lang="en-US" sz="1700" dirty="0">
+                <a:solidFill>
+                  <a:srgbClr val="3F3F46"/>
+                </a:solidFill>
+                <a:latin typeface="IBM Plex Mono" pitchFamily="34" charset="0"/>
+                <a:ea typeface="IBM Plex Mono" pitchFamily="34" charset="-122"/>
+                <a:cs typeface="IBM Plex Mono" pitchFamily="34" charset="-120"/>
+              </a:rPr>
+              <a:t>(</a:t>
+            </a:r>
+            <a:pPr indent="0" marL="0">
+              <a:lnSpc>
+                <a:spcPct val="118000"/>
+              </a:lnSpc>
+              <a:buNone/>
+            </a:pPr>
+            <a:r>
+              <a:rPr lang="en-US" sz="1700" dirty="0">
+                <a:solidFill>
+                  <a:srgbClr val="3F3F46"/>
+                </a:solidFill>
+                <a:latin typeface="IBM Plex Mono" pitchFamily="34" charset="0"/>
+                <a:ea typeface="IBM Plex Mono" pitchFamily="34" charset="-122"/>
+                <a:cs typeface="IBM Plex Mono" pitchFamily="34" charset="-120"/>
+              </a:rPr>
+              <a:t>)</a:t>
+            </a:r>
+            <a:pPr indent="0" marL="0">
+              <a:lnSpc>
+                <a:spcPct val="118000"/>
+              </a:lnSpc>
+              <a:buNone/>
+            </a:pPr>
+            <a:r>
+              <a:rPr lang="en-US" sz="1700" dirty="0">
+                <a:solidFill>
+                  <a:srgbClr val="101828"/>
+                </a:solidFill>
+                <a:latin typeface="IBM Plex Sans" pitchFamily="34" charset="0"/>
+                <a:ea typeface="IBM Plex Sans" pitchFamily="34" charset="-122"/>
+                <a:cs typeface="IBM Plex Sans" pitchFamily="34" charset="-120"/>
+              </a:rPr>
+              <a:t>, and each answer comes out one character bigger than expected. Name the character being counted, and write the line that removes it.</a:t>
+            </a:r>
+            <a:endParaRPr lang="en-US" sz="1700" dirty="0"/>
+          </a:p>
+        </p:txBody>
+      </p:sp>
+      <p:sp>
+        <p:nvSpPr>
+          <p:cNvPr id="9" name="Shape 7"/>
+          <p:cNvSpPr/>
+          <p:nvPr/>
+        </p:nvSpPr>
+        <p:spPr>
+          <a:xfrm>
+            <a:off x="10515600" y="2130552"/>
+            <a:ext cx="868680" cy="493776"/>
+          </a:xfrm>
+          <a:prstGeom prst="roundRect">
+            <a:avLst>
+              <a:gd name="adj" fmla="val 18519"/>
+            </a:avLst>
+          </a:prstGeom>
+          <a:solidFill>
+            <a:srgbClr val="EEF2FB"/>
+          </a:solidFill>
+          <a:ln/>
+        </p:spPr>
+      </p:sp>
+      <p:sp>
+        <p:nvSpPr>
+          <p:cNvPr id="10" name="Text 8"/>
+          <p:cNvSpPr txBox="1"/>
+          <p:nvPr/>
+        </p:nvSpPr>
+        <p:spPr>
+          <a:xfrm>
+            <a:off x="10515600" y="2130552"/>
+            <a:ext cx="868680" cy="493776"/>
+          </a:xfrm>
+          <a:prstGeom prst="rect">
+            <a:avLst/>
+          </a:prstGeom>
+          <a:noFill/>
+          <a:ln/>
+        </p:spPr>
+        <p:txBody>
+          <a:bodyPr wrap="square" lIns="0" tIns="0" rIns="0" bIns="0" rtlCol="0" anchor="ctr"/>
+          <a:lstStyle/>
+          <a:p>
+            <a:pPr algn="ctr" indent="0" marL="0">
+              <a:buNone/>
+            </a:pPr>
+            <a:r>
+              <a:rPr lang="en-US" sz="1500" b="1" dirty="0">
+                <a:solidFill>
+                  <a:srgbClr val="2D63FF"/>
+                </a:solidFill>
+                <a:latin typeface="IBM Plex Mono" pitchFamily="34" charset="0"/>
+                <a:ea typeface="IBM Plex Mono" pitchFamily="34" charset="-122"/>
+                <a:cs typeface="IBM Plex Mono" pitchFamily="34" charset="-120"/>
+              </a:rPr>
+              <a:t>[2]</a:t>
+            </a:r>
+            <a:endParaRPr lang="en-US" sz="1500" dirty="0"/>
+          </a:p>
+        </p:txBody>
+      </p:sp>
+      <p:sp>
+        <p:nvSpPr>
+          <p:cNvPr id="11" name="Shape 9"/>
+          <p:cNvSpPr/>
+          <p:nvPr/>
+        </p:nvSpPr>
+        <p:spPr>
+          <a:xfrm>
+            <a:off x="502920" y="3127248"/>
+            <a:ext cx="11155680" cy="1097280"/>
+          </a:xfrm>
+          <a:prstGeom prst="roundRect">
+            <a:avLst>
+              <a:gd name="adj" fmla="val 10000"/>
+            </a:avLst>
+          </a:prstGeom>
+          <a:solidFill>
+            <a:srgbClr val="FFFFFF"/>
+          </a:solidFill>
+          <a:ln w="15875">
+            <a:solidFill>
+              <a:srgbClr val="D9DEE7"/>
+            </a:solidFill>
+            <a:prstDash val="solid"/>
+          </a:ln>
+        </p:spPr>
+      </p:sp>
+      <p:sp>
+        <p:nvSpPr>
+          <p:cNvPr id="12" name="Text 10"/>
+          <p:cNvSpPr txBox="1"/>
+          <p:nvPr/>
+        </p:nvSpPr>
+        <p:spPr>
+          <a:xfrm>
+            <a:off x="914400" y="3236976"/>
+            <a:ext cx="9418320" cy="877824"/>
+          </a:xfrm>
+          <a:prstGeom prst="rect">
+            <a:avLst/>
+          </a:prstGeom>
+          <a:noFill/>
+          <a:ln/>
+        </p:spPr>
+        <p:txBody>
+          <a:bodyPr wrap="square" lIns="0" tIns="0" rIns="0" bIns="0" rtlCol="0" anchor="ctr"/>
+          <a:lstStyle/>
+          <a:p>
+            <a:pPr indent="0" marL="0">
+              <a:lnSpc>
+                <a:spcPct val="118000"/>
+              </a:lnSpc>
+              <a:buNone/>
+            </a:pPr>
+            <a:r>
+              <a:rPr lang="en-US" sz="1700" dirty="0">
+                <a:solidFill>
+                  <a:srgbClr val="101828"/>
+                </a:solidFill>
+                <a:latin typeface="IBM Plex Sans" pitchFamily="34" charset="0"/>
+                <a:ea typeface="IBM Plex Sans" pitchFamily="34" charset="-122"/>
+                <a:cs typeface="IBM Plex Sans" pitchFamily="34" charset="-120"/>
+              </a:rPr>
+              <a:t>Write a program that reads a word and adds it onto the end of </a:t>
+            </a:r>
+            <a:pPr indent="0" marL="0">
+              <a:lnSpc>
+                <a:spcPct val="118000"/>
+              </a:lnSpc>
+              <a:buNone/>
+            </a:pPr>
+            <a:r>
+              <a:rPr lang="en-US" sz="1700" dirty="0">
+                <a:solidFill>
+                  <a:srgbClr val="15803D"/>
+                </a:solidFill>
+                <a:latin typeface="IBM Plex Mono" pitchFamily="34" charset="0"/>
+                <a:ea typeface="IBM Plex Mono" pitchFamily="34" charset="-122"/>
+                <a:cs typeface="IBM Plex Mono" pitchFamily="34" charset="-120"/>
+              </a:rPr>
+              <a:t>"log.txt"</a:t>
+            </a:r>
+            <a:pPr indent="0" marL="0">
+              <a:lnSpc>
+                <a:spcPct val="118000"/>
+              </a:lnSpc>
+              <a:buNone/>
+            </a:pPr>
+            <a:r>
+              <a:rPr lang="en-US" sz="1700" dirty="0">
+                <a:solidFill>
+                  <a:srgbClr val="101828"/>
+                </a:solidFill>
+                <a:latin typeface="IBM Plex Sans" pitchFamily="34" charset="0"/>
+                <a:ea typeface="IBM Plex Sans" pitchFamily="34" charset="-122"/>
+                <a:cs typeface="IBM Plex Sans" pitchFamily="34" charset="-120"/>
+              </a:rPr>
+              <a:t> on a line of its own, without losing the lines already in the file, then prints every line of the file.</a:t>
+            </a:r>
+            <a:endParaRPr lang="en-US" sz="1700" dirty="0"/>
+          </a:p>
+        </p:txBody>
+      </p:sp>
+      <p:sp>
+        <p:nvSpPr>
+          <p:cNvPr id="13" name="Shape 11"/>
+          <p:cNvSpPr/>
+          <p:nvPr/>
+        </p:nvSpPr>
+        <p:spPr>
+          <a:xfrm>
+            <a:off x="10515600" y="3429000"/>
+            <a:ext cx="868680" cy="493776"/>
+          </a:xfrm>
+          <a:prstGeom prst="roundRect">
+            <a:avLst>
+              <a:gd name="adj" fmla="val 18519"/>
+            </a:avLst>
+          </a:prstGeom>
+          <a:solidFill>
+            <a:srgbClr val="EEF2FB"/>
+          </a:solidFill>
+          <a:ln/>
+        </p:spPr>
+      </p:sp>
+      <p:sp>
+        <p:nvSpPr>
+          <p:cNvPr id="14" name="Text 12"/>
+          <p:cNvSpPr txBox="1"/>
+          <p:nvPr/>
+        </p:nvSpPr>
+        <p:spPr>
+          <a:xfrm>
+            <a:off x="10515600" y="3429000"/>
+            <a:ext cx="868680" cy="493776"/>
+          </a:xfrm>
+          <a:prstGeom prst="rect">
+            <a:avLst/>
+          </a:prstGeom>
+          <a:noFill/>
+          <a:ln/>
+        </p:spPr>
+        <p:txBody>
+          <a:bodyPr wrap="square" lIns="0" tIns="0" rIns="0" bIns="0" rtlCol="0" anchor="ctr"/>
+          <a:lstStyle/>
+          <a:p>
+            <a:pPr algn="ctr" indent="0" marL="0">
+              <a:buNone/>
+            </a:pPr>
+            <a:r>
+              <a:rPr lang="en-US" sz="1500" b="1" dirty="0">
+                <a:solidFill>
+                  <a:srgbClr val="2D63FF"/>
+                </a:solidFill>
+                <a:latin typeface="IBM Plex Mono" pitchFamily="34" charset="0"/>
+                <a:ea typeface="IBM Plex Mono" pitchFamily="34" charset="-122"/>
+                <a:cs typeface="IBM Plex Mono" pitchFamily="34" charset="-120"/>
+              </a:rPr>
+              <a:t>[4]</a:t>
+            </a:r>
+            <a:endParaRPr lang="en-US" sz="1500" dirty="0"/>
+          </a:p>
+        </p:txBody>
+      </p:sp>
+      <p:sp>
+        <p:nvSpPr>
+          <p:cNvPr id="15" name="Shape 13"/>
+          <p:cNvSpPr/>
+          <p:nvPr/>
+        </p:nvSpPr>
+        <p:spPr>
+          <a:xfrm>
+            <a:off x="502920" y="4425696"/>
+            <a:ext cx="11155680" cy="1097280"/>
+          </a:xfrm>
+          <a:prstGeom prst="roundRect">
+            <a:avLst>
+              <a:gd name="adj" fmla="val 10000"/>
+            </a:avLst>
+          </a:prstGeom>
+          <a:solidFill>
+            <a:srgbClr val="FFFFFF"/>
+          </a:solidFill>
+          <a:ln w="15875">
+            <a:solidFill>
+              <a:srgbClr val="D9DEE7"/>
+            </a:solidFill>
+            <a:prstDash val="solid"/>
+          </a:ln>
+        </p:spPr>
+      </p:sp>
+      <p:sp>
+        <p:nvSpPr>
+          <p:cNvPr id="16" name="Text 14"/>
+          <p:cNvSpPr txBox="1"/>
+          <p:nvPr/>
+        </p:nvSpPr>
+        <p:spPr>
+          <a:xfrm>
+            <a:off x="914400" y="4535424"/>
+            <a:ext cx="9418320" cy="877824"/>
+          </a:xfrm>
+          <a:prstGeom prst="rect">
+            <a:avLst/>
+          </a:prstGeom>
+          <a:noFill/>
+          <a:ln/>
+        </p:spPr>
+        <p:txBody>
+          <a:bodyPr wrap="square" lIns="0" tIns="0" rIns="0" bIns="0" rtlCol="0" anchor="ctr"/>
+          <a:lstStyle/>
+          <a:p>
+            <a:pPr indent="0" marL="0">
+              <a:lnSpc>
+                <a:spcPct val="118000"/>
+              </a:lnSpc>
+              <a:buNone/>
+            </a:pPr>
+            <a:r>
+              <a:rPr lang="en-US" sz="1700" dirty="0">
+                <a:solidFill>
+                  <a:srgbClr val="101828"/>
+                </a:solidFill>
+                <a:latin typeface="IBM Plex Sans" pitchFamily="34" charset="0"/>
+                <a:ea typeface="IBM Plex Sans" pitchFamily="34" charset="-122"/>
+                <a:cs typeface="IBM Plex Sans" pitchFamily="34" charset="-120"/>
+              </a:rPr>
+              <a:t>Each line of </a:t>
+            </a:r>
+            <a:pPr indent="0" marL="0">
+              <a:lnSpc>
+                <a:spcPct val="118000"/>
+              </a:lnSpc>
+              <a:buNone/>
+            </a:pPr>
+            <a:r>
+              <a:rPr lang="en-US" sz="1700" dirty="0">
+                <a:solidFill>
+                  <a:srgbClr val="15803D"/>
+                </a:solidFill>
+                <a:latin typeface="IBM Plex Mono" pitchFamily="34" charset="0"/>
+                <a:ea typeface="IBM Plex Mono" pitchFamily="34" charset="-122"/>
+                <a:cs typeface="IBM Plex Mono" pitchFamily="34" charset="-120"/>
+              </a:rPr>
+              <a:t>"data.txt"</a:t>
+            </a:r>
+            <a:pPr indent="0" marL="0">
+              <a:lnSpc>
+                <a:spcPct val="118000"/>
+              </a:lnSpc>
+              <a:buNone/>
+            </a:pPr>
+            <a:r>
+              <a:rPr lang="en-US" sz="1700" dirty="0">
+                <a:solidFill>
+                  <a:srgbClr val="101828"/>
+                </a:solidFill>
+                <a:latin typeface="IBM Plex Sans" pitchFamily="34" charset="0"/>
+                <a:ea typeface="IBM Plex Sans" pitchFamily="34" charset="-122"/>
+                <a:cs typeface="IBM Plex Sans" pitchFamily="34" charset="-120"/>
+              </a:rPr>
+              <a:t> holds a word and a whole number, separated by a comma. Write a program that prints the word from every line whose number is 16 or more.</a:t>
+            </a:r>
+            <a:endParaRPr lang="en-US" sz="1700" dirty="0"/>
+          </a:p>
+        </p:txBody>
+      </p:sp>
+      <p:sp>
+        <p:nvSpPr>
+          <p:cNvPr id="17" name="Shape 15"/>
+          <p:cNvSpPr/>
+          <p:nvPr/>
+        </p:nvSpPr>
+        <p:spPr>
+          <a:xfrm>
+            <a:off x="10515600" y="4727448"/>
+            <a:ext cx="868680" cy="493776"/>
+          </a:xfrm>
+          <a:prstGeom prst="roundRect">
+            <a:avLst>
+              <a:gd name="adj" fmla="val 18519"/>
+            </a:avLst>
+          </a:prstGeom>
+          <a:solidFill>
+            <a:srgbClr val="EEF2FB"/>
+          </a:solidFill>
+          <a:ln/>
+        </p:spPr>
+      </p:sp>
+      <p:sp>
+        <p:nvSpPr>
+          <p:cNvPr id="18" name="Text 16"/>
+          <p:cNvSpPr txBox="1"/>
+          <p:nvPr/>
+        </p:nvSpPr>
+        <p:spPr>
+          <a:xfrm>
+            <a:off x="10515600" y="4727448"/>
+            <a:ext cx="868680" cy="493776"/>
+          </a:xfrm>
+          <a:prstGeom prst="rect">
+            <a:avLst/>
+          </a:prstGeom>
+          <a:noFill/>
+          <a:ln/>
+        </p:spPr>
+        <p:txBody>
+          <a:bodyPr wrap="square" lIns="0" tIns="0" rIns="0" bIns="0" rtlCol="0" anchor="ctr"/>
+          <a:lstStyle/>
+          <a:p>
+            <a:pPr algn="ctr" indent="0" marL="0">
+              <a:buNone/>
+            </a:pPr>
+            <a:r>
+              <a:rPr lang="en-US" sz="1500" b="1" dirty="0">
+                <a:solidFill>
+                  <a:srgbClr val="2D63FF"/>
+                </a:solidFill>
+                <a:latin typeface="IBM Plex Mono" pitchFamily="34" charset="0"/>
+                <a:ea typeface="IBM Plex Mono" pitchFamily="34" charset="-122"/>
+                <a:cs typeface="IBM Plex Mono" pitchFamily="34" charset="-120"/>
+              </a:rPr>
+              <a:t>[5]</a:t>
+            </a:r>
+            <a:endParaRPr lang="en-US" sz="1500" dirty="0"/>
+          </a:p>
+        </p:txBody>
+      </p:sp>
+    </p:spTree>
+  </p:cSld>
+  <p:clrMapOvr>
+    <a:masterClrMapping/>
+  </p:clrMapOvr>
+</p:sld>
+</file>
+
+<file path=ppt/slides/slide15.xml><?xml version="1.0" encoding="utf-8"?>
+<p:sld xmlns:a="http://schemas.openxmlformats.org/drawingml/2006/main" xmlns:r="http://schemas.openxmlformats.org/officeDocument/2006/relationships" xmlns:p="http://schemas.openxmlformats.org/presentationml/2006/main">
+  <p:cSld name="Slide 15">
     <p:bg>
       <p:bgPr>
         <a:solidFill>
